--- a/03_Selektion/03_Selektion.pptx
+++ b/03_Selektion/03_Selektion.pptx
@@ -5,32 +5,31 @@
     <p:sldMasterId id="2147483671" r:id="rId1"/>
   </p:sldMasterIdLst>
   <p:notesMasterIdLst>
-    <p:notesMasterId r:id="rId25"/>
+    <p:notesMasterId r:id="rId24"/>
   </p:notesMasterIdLst>
   <p:sldIdLst>
     <p:sldId id="279" r:id="rId2"/>
     <p:sldId id="280" r:id="rId3"/>
-    <p:sldId id="281" r:id="rId4"/>
-    <p:sldId id="292" r:id="rId5"/>
-    <p:sldId id="282" r:id="rId6"/>
-    <p:sldId id="283" r:id="rId7"/>
-    <p:sldId id="264" r:id="rId8"/>
-    <p:sldId id="284" r:id="rId9"/>
-    <p:sldId id="286" r:id="rId10"/>
-    <p:sldId id="263" r:id="rId11"/>
-    <p:sldId id="267" r:id="rId12"/>
-    <p:sldId id="268" r:id="rId13"/>
-    <p:sldId id="269" r:id="rId14"/>
-    <p:sldId id="270" r:id="rId15"/>
-    <p:sldId id="288" r:id="rId16"/>
-    <p:sldId id="271" r:id="rId17"/>
-    <p:sldId id="274" r:id="rId18"/>
-    <p:sldId id="272" r:id="rId19"/>
-    <p:sldId id="273" r:id="rId20"/>
-    <p:sldId id="289" r:id="rId21"/>
-    <p:sldId id="291" r:id="rId22"/>
-    <p:sldId id="275" r:id="rId23"/>
-    <p:sldId id="277" r:id="rId24"/>
+    <p:sldId id="292" r:id="rId4"/>
+    <p:sldId id="282" r:id="rId5"/>
+    <p:sldId id="283" r:id="rId6"/>
+    <p:sldId id="264" r:id="rId7"/>
+    <p:sldId id="284" r:id="rId8"/>
+    <p:sldId id="286" r:id="rId9"/>
+    <p:sldId id="263" r:id="rId10"/>
+    <p:sldId id="267" r:id="rId11"/>
+    <p:sldId id="268" r:id="rId12"/>
+    <p:sldId id="269" r:id="rId13"/>
+    <p:sldId id="270" r:id="rId14"/>
+    <p:sldId id="288" r:id="rId15"/>
+    <p:sldId id="271" r:id="rId16"/>
+    <p:sldId id="274" r:id="rId17"/>
+    <p:sldId id="272" r:id="rId18"/>
+    <p:sldId id="273" r:id="rId19"/>
+    <p:sldId id="289" r:id="rId20"/>
+    <p:sldId id="291" r:id="rId21"/>
+    <p:sldId id="275" r:id="rId22"/>
+    <p:sldId id="277" r:id="rId23"/>
   </p:sldIdLst>
   <p:sldSz cx="9144000" cy="6858000" type="screen4x3"/>
   <p:notesSz cx="6858000" cy="9144000"/>
@@ -2160,502 +2159,6 @@
         </p:nvSpPr>
         <p:spPr>
           <a:xfrm>
-            <a:off x="757169" y="1261240"/>
-            <a:ext cx="7453259" cy="646331"/>
-          </a:xfrm>
-          <a:prstGeom prst="rect">
-            <a:avLst/>
-          </a:prstGeom>
-          <a:noFill/>
-        </p:spPr>
-        <p:txBody>
-          <a:bodyPr wrap="none" rtlCol="0">
-            <a:spAutoFit/>
-          </a:bodyPr>
-          <a:lstStyle/>
-          <a:p>
-            <a:r>
-              <a:rPr lang="de-AT" b="1" i="1" dirty="0"/>
-              <a:t>Einseitige Verzweigung</a:t>
-            </a:r>
-          </a:p>
-          <a:p>
-            <a:r>
-              <a:rPr lang="de-AT" dirty="0"/>
-              <a:t>Trifft eine </a:t>
-            </a:r>
-            <a:r>
-              <a:rPr lang="de-AT" dirty="0">
-                <a:solidFill>
-                  <a:srgbClr val="FF0000"/>
-                </a:solidFill>
-              </a:rPr>
-              <a:t>&lt;</a:t>
-            </a:r>
-            <a:r>
-              <a:rPr lang="de-AT" i="1" dirty="0">
-                <a:solidFill>
-                  <a:srgbClr val="FF0000"/>
-                </a:solidFill>
-              </a:rPr>
-              <a:t>Bedingung&gt;</a:t>
-            </a:r>
-            <a:r>
-              <a:rPr lang="de-AT" dirty="0"/>
-              <a:t> zu, so werden bestimmte </a:t>
-            </a:r>
-            <a:r>
-              <a:rPr lang="de-AT" dirty="0">
-                <a:solidFill>
-                  <a:srgbClr val="CC3300"/>
-                </a:solidFill>
-              </a:rPr>
-              <a:t>&lt;</a:t>
-            </a:r>
-            <a:r>
-              <a:rPr lang="de-AT" i="1" dirty="0">
-                <a:solidFill>
-                  <a:srgbClr val="CC3300"/>
-                </a:solidFill>
-              </a:rPr>
-              <a:t>Anweisungen&gt;</a:t>
-            </a:r>
-            <a:r>
-              <a:rPr lang="de-AT" dirty="0">
-                <a:solidFill>
-                  <a:srgbClr val="CC3300"/>
-                </a:solidFill>
-              </a:rPr>
-              <a:t> </a:t>
-            </a:r>
-            <a:r>
-              <a:rPr lang="de-AT" dirty="0"/>
-              <a:t>ausgeführt.</a:t>
-            </a:r>
-          </a:p>
-        </p:txBody>
-      </p:sp>
-      <p:sp>
-        <p:nvSpPr>
-          <p:cNvPr id="12" name="Flussdiagramm: Verzweigung 11"/>
-          <p:cNvSpPr/>
-          <p:nvPr/>
-        </p:nvSpPr>
-        <p:spPr>
-          <a:xfrm>
-            <a:off x="2735796" y="2701400"/>
-            <a:ext cx="3348371" cy="756084"/>
-          </a:xfrm>
-          <a:prstGeom prst="flowChartDecision">
-            <a:avLst/>
-          </a:prstGeom>
-          <a:solidFill>
-            <a:schemeClr val="accent5">
-              <a:lumMod val="20000"/>
-              <a:lumOff val="80000"/>
-            </a:schemeClr>
-          </a:solidFill>
-        </p:spPr>
-        <p:style>
-          <a:lnRef idx="2">
-            <a:schemeClr val="accent1">
-              <a:shade val="50000"/>
-            </a:schemeClr>
-          </a:lnRef>
-          <a:fillRef idx="1">
-            <a:schemeClr val="accent1"/>
-          </a:fillRef>
-          <a:effectRef idx="0">
-            <a:schemeClr val="accent1"/>
-          </a:effectRef>
-          <a:fontRef idx="minor">
-            <a:schemeClr val="lt1"/>
-          </a:fontRef>
-        </p:style>
-        <p:txBody>
-          <a:bodyPr rtlCol="0" anchor="ctr"/>
-          <a:lstStyle/>
-          <a:p>
-            <a:pPr algn="ctr"/>
-            <a:r>
-              <a:rPr lang="de-AT" i="1" dirty="0">
-                <a:solidFill>
-                  <a:srgbClr val="FF0000"/>
-                </a:solidFill>
-              </a:rPr>
-              <a:t>&lt;Bedingung&gt;</a:t>
-            </a:r>
-          </a:p>
-        </p:txBody>
-      </p:sp>
-      <p:cxnSp>
-        <p:nvCxnSpPr>
-          <p:cNvPr id="14" name="Gerade Verbindung mit Pfeil 13"/>
-          <p:cNvCxnSpPr>
-            <a:endCxn id="12" idx="0"/>
-          </p:cNvCxnSpPr>
-          <p:nvPr/>
-        </p:nvCxnSpPr>
-        <p:spPr>
-          <a:xfrm flipH="1">
-            <a:off x="4409982" y="2197344"/>
-            <a:ext cx="1592" cy="504056"/>
-          </a:xfrm>
-          <a:prstGeom prst="straightConnector1">
-            <a:avLst/>
-          </a:prstGeom>
-          <a:ln w="22225">
-            <a:solidFill>
-              <a:schemeClr val="tx2"/>
-            </a:solidFill>
-            <a:tailEnd type="arrow"/>
-          </a:ln>
-        </p:spPr>
-        <p:style>
-          <a:lnRef idx="1">
-            <a:schemeClr val="accent1"/>
-          </a:lnRef>
-          <a:fillRef idx="0">
-            <a:schemeClr val="accent1"/>
-          </a:fillRef>
-          <a:effectRef idx="0">
-            <a:schemeClr val="accent1"/>
-          </a:effectRef>
-          <a:fontRef idx="minor">
-            <a:schemeClr val="tx1"/>
-          </a:fontRef>
-        </p:style>
-      </p:cxnSp>
-      <p:cxnSp>
-        <p:nvCxnSpPr>
-          <p:cNvPr id="17" name="Gewinkelte Verbindung 16"/>
-          <p:cNvCxnSpPr>
-            <a:stCxn id="12" idx="3"/>
-          </p:cNvCxnSpPr>
-          <p:nvPr/>
-        </p:nvCxnSpPr>
-        <p:spPr>
-          <a:xfrm>
-            <a:off x="6084167" y="3079442"/>
-            <a:ext cx="289626" cy="1494165"/>
-          </a:xfrm>
-          <a:prstGeom prst="bentConnector2">
-            <a:avLst/>
-          </a:prstGeom>
-          <a:ln w="22225">
-            <a:solidFill>
-              <a:schemeClr val="tx2"/>
-            </a:solidFill>
-            <a:tailEnd type="none"/>
-          </a:ln>
-        </p:spPr>
-        <p:style>
-          <a:lnRef idx="1">
-            <a:schemeClr val="accent1"/>
-          </a:lnRef>
-          <a:fillRef idx="0">
-            <a:schemeClr val="accent1"/>
-          </a:fillRef>
-          <a:effectRef idx="0">
-            <a:schemeClr val="accent1"/>
-          </a:effectRef>
-          <a:fontRef idx="minor">
-            <a:schemeClr val="tx1"/>
-          </a:fontRef>
-        </p:style>
-      </p:cxnSp>
-      <p:cxnSp>
-        <p:nvCxnSpPr>
-          <p:cNvPr id="19" name="Gewinkelte Verbindung 18"/>
-          <p:cNvCxnSpPr>
-            <a:stCxn id="12" idx="1"/>
-            <a:endCxn id="20" idx="0"/>
-          </p:cNvCxnSpPr>
-          <p:nvPr/>
-        </p:nvCxnSpPr>
-        <p:spPr>
-          <a:xfrm rot="10800000" flipV="1">
-            <a:off x="2447764" y="3079442"/>
-            <a:ext cx="288032" cy="630070"/>
-          </a:xfrm>
-          <a:prstGeom prst="bentConnector2">
-            <a:avLst/>
-          </a:prstGeom>
-          <a:ln w="22225">
-            <a:solidFill>
-              <a:schemeClr val="tx2"/>
-            </a:solidFill>
-            <a:tailEnd type="arrow"/>
-          </a:ln>
-        </p:spPr>
-        <p:style>
-          <a:lnRef idx="1">
-            <a:schemeClr val="accent1"/>
-          </a:lnRef>
-          <a:fillRef idx="0">
-            <a:schemeClr val="accent1"/>
-          </a:fillRef>
-          <a:effectRef idx="0">
-            <a:schemeClr val="accent1"/>
-          </a:effectRef>
-          <a:fontRef idx="minor">
-            <a:schemeClr val="tx1"/>
-          </a:fontRef>
-        </p:style>
-      </p:cxnSp>
-      <p:sp>
-        <p:nvSpPr>
-          <p:cNvPr id="20" name="Flussdiagramm: Prozess 19"/>
-          <p:cNvSpPr/>
-          <p:nvPr/>
-        </p:nvSpPr>
-        <p:spPr>
-          <a:xfrm>
-            <a:off x="1403018" y="3709512"/>
-            <a:ext cx="2089491" cy="504056"/>
-          </a:xfrm>
-          <a:prstGeom prst="flowChartProcess">
-            <a:avLst/>
-          </a:prstGeom>
-          <a:solidFill>
-            <a:schemeClr val="accent5">
-              <a:lumMod val="20000"/>
-              <a:lumOff val="80000"/>
-            </a:schemeClr>
-          </a:solidFill>
-        </p:spPr>
-        <p:style>
-          <a:lnRef idx="2">
-            <a:schemeClr val="accent1">
-              <a:shade val="50000"/>
-            </a:schemeClr>
-          </a:lnRef>
-          <a:fillRef idx="1">
-            <a:schemeClr val="accent1"/>
-          </a:fillRef>
-          <a:effectRef idx="0">
-            <a:schemeClr val="accent1"/>
-          </a:effectRef>
-          <a:fontRef idx="minor">
-            <a:schemeClr val="lt1"/>
-          </a:fontRef>
-        </p:style>
-        <p:txBody>
-          <a:bodyPr rtlCol="0" anchor="ctr"/>
-          <a:lstStyle/>
-          <a:p>
-            <a:pPr algn="ctr"/>
-            <a:r>
-              <a:rPr lang="de-AT" i="1" dirty="0">
-                <a:solidFill>
-                  <a:srgbClr val="CC3300"/>
-                </a:solidFill>
-              </a:rPr>
-              <a:t>&lt;Anweisungen&gt;</a:t>
-            </a:r>
-          </a:p>
-        </p:txBody>
-      </p:sp>
-      <p:cxnSp>
-        <p:nvCxnSpPr>
-          <p:cNvPr id="1025" name="Gewinkelte Verbindung 1024"/>
-          <p:cNvCxnSpPr>
-            <a:stCxn id="20" idx="2"/>
-          </p:cNvCxnSpPr>
-          <p:nvPr/>
-        </p:nvCxnSpPr>
-        <p:spPr>
-          <a:xfrm rot="16200000" flipH="1">
-            <a:off x="4230759" y="2430573"/>
-            <a:ext cx="360039" cy="3926028"/>
-          </a:xfrm>
-          <a:prstGeom prst="bentConnector2">
-            <a:avLst/>
-          </a:prstGeom>
-          <a:ln w="22225">
-            <a:solidFill>
-              <a:schemeClr val="tx2"/>
-            </a:solidFill>
-          </a:ln>
-        </p:spPr>
-        <p:style>
-          <a:lnRef idx="1">
-            <a:schemeClr val="accent1"/>
-          </a:lnRef>
-          <a:fillRef idx="0">
-            <a:schemeClr val="accent1"/>
-          </a:fillRef>
-          <a:effectRef idx="0">
-            <a:schemeClr val="accent1"/>
-          </a:effectRef>
-          <a:fontRef idx="minor">
-            <a:schemeClr val="tx1"/>
-          </a:fontRef>
-        </p:style>
-      </p:cxnSp>
-      <p:cxnSp>
-        <p:nvCxnSpPr>
-          <p:cNvPr id="1029" name="Gerade Verbindung mit Pfeil 1028"/>
-          <p:cNvCxnSpPr/>
-          <p:nvPr/>
-        </p:nvCxnSpPr>
-        <p:spPr>
-          <a:xfrm>
-            <a:off x="4428613" y="4573608"/>
-            <a:ext cx="0" cy="648072"/>
-          </a:xfrm>
-          <a:prstGeom prst="straightConnector1">
-            <a:avLst/>
-          </a:prstGeom>
-          <a:ln w="22225">
-            <a:solidFill>
-              <a:schemeClr val="tx2"/>
-            </a:solidFill>
-            <a:tailEnd type="arrow"/>
-          </a:ln>
-        </p:spPr>
-        <p:style>
-          <a:lnRef idx="1">
-            <a:schemeClr val="accent1"/>
-          </a:lnRef>
-          <a:fillRef idx="0">
-            <a:schemeClr val="accent1"/>
-          </a:fillRef>
-          <a:effectRef idx="0">
-            <a:schemeClr val="accent1"/>
-          </a:effectRef>
-          <a:fontRef idx="minor">
-            <a:schemeClr val="tx1"/>
-          </a:fontRef>
-        </p:style>
-      </p:cxnSp>
-      <p:sp>
-        <p:nvSpPr>
-          <p:cNvPr id="3" name="Textfeld 2"/>
-          <p:cNvSpPr txBox="1"/>
-          <p:nvPr/>
-        </p:nvSpPr>
-        <p:spPr>
-          <a:xfrm>
-            <a:off x="2341345" y="2764116"/>
-            <a:ext cx="599972" cy="369332"/>
-          </a:xfrm>
-          <a:prstGeom prst="rect">
-            <a:avLst/>
-          </a:prstGeom>
-          <a:noFill/>
-        </p:spPr>
-        <p:txBody>
-          <a:bodyPr wrap="none" rtlCol="0">
-            <a:spAutoFit/>
-          </a:bodyPr>
-          <a:lstStyle/>
-          <a:p>
-            <a:r>
-              <a:rPr lang="de-AT" dirty="0"/>
-              <a:t>True</a:t>
-            </a:r>
-          </a:p>
-        </p:txBody>
-      </p:sp>
-      <p:sp>
-        <p:nvSpPr>
-          <p:cNvPr id="18" name="Textfeld 17"/>
-          <p:cNvSpPr txBox="1"/>
-          <p:nvPr/>
-        </p:nvSpPr>
-        <p:spPr>
-          <a:xfrm>
-            <a:off x="5773821" y="2764116"/>
-            <a:ext cx="652936" cy="369332"/>
-          </a:xfrm>
-          <a:prstGeom prst="rect">
-            <a:avLst/>
-          </a:prstGeom>
-          <a:noFill/>
-        </p:spPr>
-        <p:txBody>
-          <a:bodyPr wrap="none" rtlCol="0">
-            <a:spAutoFit/>
-          </a:bodyPr>
-          <a:lstStyle/>
-          <a:p>
-            <a:r>
-              <a:rPr lang="de-AT" dirty="0" err="1"/>
-              <a:t>False</a:t>
-            </a:r>
-            <a:endParaRPr lang="de-AT" dirty="0"/>
-          </a:p>
-        </p:txBody>
-      </p:sp>
-      <p:sp>
-        <p:nvSpPr>
-          <p:cNvPr id="10" name="Titel 9"/>
-          <p:cNvSpPr>
-            <a:spLocks noGrp="1"/>
-          </p:cNvSpPr>
-          <p:nvPr>
-            <p:ph type="title"/>
-          </p:nvPr>
-        </p:nvSpPr>
-        <p:spPr/>
-        <p:txBody>
-          <a:bodyPr/>
-          <a:lstStyle/>
-          <a:p>
-            <a:r>
-              <a:rPr lang="de-AT" dirty="0"/>
-              <a:t>Einseitige Verzweigung</a:t>
-            </a:r>
-          </a:p>
-        </p:txBody>
-      </p:sp>
-    </p:spTree>
-    <p:extLst>
-      <p:ext uri="{BB962C8B-B14F-4D97-AF65-F5344CB8AC3E}">
-        <p14:creationId xmlns:p14="http://schemas.microsoft.com/office/powerpoint/2010/main" val="2666897657"/>
-      </p:ext>
-    </p:extLst>
-  </p:cSld>
-  <p:clrMapOvr>
-    <a:masterClrMapping/>
-  </p:clrMapOvr>
-</p:sld>
-</file>
-
-<file path=ppt/slides/slide11.xml><?xml version="1.0" encoding="utf-8"?>
-<p:sld xmlns:a="http://schemas.openxmlformats.org/drawingml/2006/main" xmlns:r="http://schemas.openxmlformats.org/officeDocument/2006/relationships" xmlns:p="http://schemas.openxmlformats.org/presentationml/2006/main">
-  <p:cSld>
-    <p:bg>
-      <p:bgPr>
-        <a:solidFill>
-          <a:schemeClr val="bg1"/>
-        </a:solidFill>
-        <a:effectLst/>
-      </p:bgPr>
-    </p:bg>
-    <p:spTree>
-      <p:nvGrpSpPr>
-        <p:cNvPr id="1" name=""/>
-        <p:cNvGrpSpPr/>
-        <p:nvPr/>
-      </p:nvGrpSpPr>
-      <p:grpSpPr>
-        <a:xfrm>
-          <a:off x="0" y="0"/>
-          <a:ext cx="0" cy="0"/>
-          <a:chOff x="0" y="0"/>
-          <a:chExt cx="0" cy="0"/>
-        </a:xfrm>
-      </p:grpSpPr>
-      <p:sp>
-        <p:nvSpPr>
-          <p:cNvPr id="7" name="Textfeld 6"/>
-          <p:cNvSpPr txBox="1"/>
-          <p:nvPr/>
-        </p:nvSpPr>
-        <p:spPr>
-          <a:xfrm>
             <a:off x="597521" y="1412776"/>
             <a:ext cx="7453259" cy="646331"/>
           </a:xfrm>
@@ -3054,7 +2557,7 @@
 </p:sld>
 </file>
 
-<file path=ppt/slides/slide12.xml><?xml version="1.0" encoding="utf-8"?>
+<file path=ppt/slides/slide11.xml><?xml version="1.0" encoding="utf-8"?>
 <p:sld xmlns:a="http://schemas.openxmlformats.org/drawingml/2006/main" xmlns:r="http://schemas.openxmlformats.org/officeDocument/2006/relationships" xmlns:p="http://schemas.openxmlformats.org/presentationml/2006/main">
   <p:cSld>
     <p:bg>
@@ -3709,7 +3212,7 @@
 </p:sld>
 </file>
 
-<file path=ppt/slides/slide13.xml><?xml version="1.0" encoding="utf-8"?>
+<file path=ppt/slides/slide12.xml><?xml version="1.0" encoding="utf-8"?>
 <p:sld xmlns:a="http://schemas.openxmlformats.org/drawingml/2006/main" xmlns:r="http://schemas.openxmlformats.org/officeDocument/2006/relationships" xmlns:p="http://schemas.openxmlformats.org/presentationml/2006/main">
   <p:cSld>
     <p:bg>
@@ -4098,7 +3601,7 @@
 </p:sld>
 </file>
 
-<file path=ppt/slides/slide14.xml><?xml version="1.0" encoding="utf-8"?>
+<file path=ppt/slides/slide13.xml><?xml version="1.0" encoding="utf-8"?>
 <p:sld xmlns:a="http://schemas.openxmlformats.org/drawingml/2006/main" xmlns:r="http://schemas.openxmlformats.org/officeDocument/2006/relationships" xmlns:p="http://schemas.openxmlformats.org/presentationml/2006/main">
   <p:cSld>
     <p:bg>
@@ -4453,7 +3956,7 @@
 </p:sld>
 </file>
 
-<file path=ppt/slides/slide15.xml><?xml version="1.0" encoding="utf-8"?>
+<file path=ppt/slides/slide14.xml><?xml version="1.0" encoding="utf-8"?>
 <p:sld xmlns:a="http://schemas.openxmlformats.org/drawingml/2006/main" xmlns:r="http://schemas.openxmlformats.org/officeDocument/2006/relationships" xmlns:p="http://schemas.openxmlformats.org/presentationml/2006/main">
   <p:cSld>
     <p:spTree>
@@ -4937,7 +4440,7 @@
 </p:sld>
 </file>
 
-<file path=ppt/slides/slide16.xml><?xml version="1.0" encoding="utf-8"?>
+<file path=ppt/slides/slide15.xml><?xml version="1.0" encoding="utf-8"?>
 <p:sld xmlns:a="http://schemas.openxmlformats.org/drawingml/2006/main" xmlns:r="http://schemas.openxmlformats.org/officeDocument/2006/relationships" xmlns:p="http://schemas.openxmlformats.org/presentationml/2006/main">
   <p:cSld>
     <p:bg>
@@ -5895,7 +5398,7 @@
 </p:sld>
 </file>
 
-<file path=ppt/slides/slide17.xml><?xml version="1.0" encoding="utf-8"?>
+<file path=ppt/slides/slide16.xml><?xml version="1.0" encoding="utf-8"?>
 <p:sld xmlns:a="http://schemas.openxmlformats.org/drawingml/2006/main" xmlns:r="http://schemas.openxmlformats.org/officeDocument/2006/relationships" xmlns:p="http://schemas.openxmlformats.org/presentationml/2006/main">
   <p:cSld>
     <p:bg>
@@ -6461,7 +5964,7 @@
 </p:sld>
 </file>
 
-<file path=ppt/slides/slide18.xml><?xml version="1.0" encoding="utf-8"?>
+<file path=ppt/slides/slide17.xml><?xml version="1.0" encoding="utf-8"?>
 <p:sld xmlns:a="http://schemas.openxmlformats.org/drawingml/2006/main" xmlns:r="http://schemas.openxmlformats.org/officeDocument/2006/relationships" xmlns:p="http://schemas.openxmlformats.org/presentationml/2006/main">
   <p:cSld>
     <p:bg>
@@ -7374,7 +6877,7 @@
 </p:sld>
 </file>
 
-<file path=ppt/slides/slide19.xml><?xml version="1.0" encoding="utf-8"?>
+<file path=ppt/slides/slide18.xml><?xml version="1.0" encoding="utf-8"?>
 <p:sld xmlns:a="http://schemas.openxmlformats.org/drawingml/2006/main" xmlns:r="http://schemas.openxmlformats.org/officeDocument/2006/relationships" xmlns:p="http://schemas.openxmlformats.org/presentationml/2006/main">
   <p:cSld>
     <p:bg>
@@ -8067,499 +7570,7 @@
 </p:sld>
 </file>
 
-<file path=ppt/slides/slide2.xml><?xml version="1.0" encoding="utf-8"?>
-<p:sld xmlns:a="http://schemas.openxmlformats.org/drawingml/2006/main" xmlns:r="http://schemas.openxmlformats.org/officeDocument/2006/relationships" xmlns:p="http://schemas.openxmlformats.org/presentationml/2006/main">
-  <p:cSld>
-    <p:spTree>
-      <p:nvGrpSpPr>
-        <p:cNvPr id="1" name=""/>
-        <p:cNvGrpSpPr/>
-        <p:nvPr/>
-      </p:nvGrpSpPr>
-      <p:grpSpPr>
-        <a:xfrm>
-          <a:off x="0" y="0"/>
-          <a:ext cx="0" cy="0"/>
-          <a:chOff x="0" y="0"/>
-          <a:chExt cx="0" cy="0"/>
-        </a:xfrm>
-      </p:grpSpPr>
-      <p:sp>
-        <p:nvSpPr>
-          <p:cNvPr id="72" name="Shape 72"/>
-          <p:cNvSpPr>
-            <a:spLocks noGrp="1"/>
-          </p:cNvSpPr>
-          <p:nvPr>
-            <p:ph type="body" idx="1"/>
-          </p:nvPr>
-        </p:nvSpPr>
-        <p:spPr>
-          <a:xfrm>
-            <a:off x="250031" y="1484784"/>
-            <a:ext cx="8643938" cy="4772645"/>
-          </a:xfrm>
-          <a:prstGeom prst="rect">
-            <a:avLst/>
-          </a:prstGeom>
-        </p:spPr>
-        <p:txBody>
-          <a:bodyPr lIns="0" tIns="0" rIns="0" bIns="0">
-            <a:normAutofit/>
-          </a:bodyPr>
-          <a:lstStyle/>
-          <a:p>
-            <a:pPr marL="0" indent="0">
-              <a:buNone/>
-            </a:pPr>
-            <a:r>
-              <a:rPr lang="de-AT" sz="1800" dirty="0" err="1">
-                <a:solidFill>
-                  <a:srgbClr val="0000FF"/>
-                </a:solidFill>
-                <a:latin typeface="Consolas" panose="020B0609020204030204" pitchFamily="49" charset="0"/>
-              </a:rPr>
-              <a:t>using</a:t>
-            </a:r>
-            <a:r>
-              <a:rPr lang="de-AT" sz="1800" dirty="0">
-                <a:solidFill>
-                  <a:srgbClr val="000000"/>
-                </a:solidFill>
-                <a:latin typeface="Consolas" panose="020B0609020204030204" pitchFamily="49" charset="0"/>
-              </a:rPr>
-              <a:t> System;</a:t>
-            </a:r>
-          </a:p>
-          <a:p>
-            <a:pPr marL="0" indent="0">
-              <a:buNone/>
-            </a:pPr>
-            <a:endParaRPr lang="de-AT" sz="1800" dirty="0">
-              <a:solidFill>
-                <a:srgbClr val="000000"/>
-              </a:solidFill>
-              <a:latin typeface="Consolas" panose="020B0609020204030204" pitchFamily="49" charset="0"/>
-            </a:endParaRPr>
-          </a:p>
-          <a:p>
-            <a:pPr marL="0" indent="0">
-              <a:buNone/>
-            </a:pPr>
-            <a:r>
-              <a:rPr lang="de-AT" sz="1800" dirty="0" err="1">
-                <a:solidFill>
-                  <a:srgbClr val="0000FF"/>
-                </a:solidFill>
-                <a:latin typeface="Consolas" panose="020B0609020204030204" pitchFamily="49" charset="0"/>
-              </a:rPr>
-              <a:t>const</a:t>
-            </a:r>
-            <a:r>
-              <a:rPr lang="de-AT" sz="1800" dirty="0">
-                <a:solidFill>
-                  <a:srgbClr val="000000"/>
-                </a:solidFill>
-                <a:latin typeface="Consolas" panose="020B0609020204030204" pitchFamily="49" charset="0"/>
-              </a:rPr>
-              <a:t> </a:t>
-            </a:r>
-            <a:r>
-              <a:rPr lang="de-AT" sz="1800" dirty="0" err="1">
-                <a:solidFill>
-                  <a:srgbClr val="0000FF"/>
-                </a:solidFill>
-                <a:latin typeface="Consolas" panose="020B0609020204030204" pitchFamily="49" charset="0"/>
-              </a:rPr>
-              <a:t>int</a:t>
-            </a:r>
-            <a:r>
-              <a:rPr lang="de-AT" sz="1800" dirty="0">
-                <a:solidFill>
-                  <a:srgbClr val="000000"/>
-                </a:solidFill>
-                <a:latin typeface="Consolas" panose="020B0609020204030204" pitchFamily="49" charset="0"/>
-              </a:rPr>
-              <a:t> GROWN_UP_AGE = 18;</a:t>
-            </a:r>
-          </a:p>
-          <a:p>
-            <a:pPr marL="0" indent="0">
-              <a:buNone/>
-            </a:pPr>
-            <a:endParaRPr lang="de-AT" sz="1800" dirty="0">
-              <a:solidFill>
-                <a:srgbClr val="000000"/>
-              </a:solidFill>
-              <a:latin typeface="Consolas" panose="020B0609020204030204" pitchFamily="49" charset="0"/>
-            </a:endParaRPr>
-          </a:p>
-          <a:p>
-            <a:pPr marL="0" indent="0">
-              <a:buNone/>
-            </a:pPr>
-            <a:r>
-              <a:rPr lang="en-US" sz="1800" dirty="0" err="1">
-                <a:solidFill>
-                  <a:srgbClr val="000000"/>
-                </a:solidFill>
-                <a:latin typeface="Consolas" panose="020B0609020204030204" pitchFamily="49" charset="0"/>
-              </a:rPr>
-              <a:t>Console.Write</a:t>
-            </a:r>
-            <a:r>
-              <a:rPr lang="en-US" sz="1800" dirty="0">
-                <a:solidFill>
-                  <a:srgbClr val="000000"/>
-                </a:solidFill>
-                <a:latin typeface="Consolas" panose="020B0609020204030204" pitchFamily="49" charset="0"/>
-              </a:rPr>
-              <a:t>(</a:t>
-            </a:r>
-            <a:r>
-              <a:rPr lang="en-US" sz="1800" dirty="0">
-                <a:solidFill>
-                  <a:srgbClr val="A31515"/>
-                </a:solidFill>
-                <a:latin typeface="Consolas" panose="020B0609020204030204" pitchFamily="49" charset="0"/>
-              </a:rPr>
-              <a:t>"How old are you? "</a:t>
-            </a:r>
-            <a:r>
-              <a:rPr lang="en-US" sz="1800" dirty="0">
-                <a:solidFill>
-                  <a:srgbClr val="000000"/>
-                </a:solidFill>
-                <a:latin typeface="Consolas" panose="020B0609020204030204" pitchFamily="49" charset="0"/>
-              </a:rPr>
-              <a:t>);</a:t>
-            </a:r>
-          </a:p>
-          <a:p>
-            <a:pPr marL="0" indent="0">
-              <a:buNone/>
-            </a:pPr>
-            <a:r>
-              <a:rPr lang="de-AT" sz="1800" dirty="0" err="1">
-                <a:solidFill>
-                  <a:srgbClr val="0000FF"/>
-                </a:solidFill>
-                <a:latin typeface="Consolas" panose="020B0609020204030204" pitchFamily="49" charset="0"/>
-              </a:rPr>
-              <a:t>string</a:t>
-            </a:r>
-            <a:r>
-              <a:rPr lang="de-AT" sz="1800" dirty="0">
-                <a:solidFill>
-                  <a:srgbClr val="000000"/>
-                </a:solidFill>
-                <a:latin typeface="Consolas" panose="020B0609020204030204" pitchFamily="49" charset="0"/>
-              </a:rPr>
-              <a:t> </a:t>
-            </a:r>
-            <a:r>
-              <a:rPr lang="de-AT" sz="1800" dirty="0" err="1">
-                <a:solidFill>
-                  <a:srgbClr val="000000"/>
-                </a:solidFill>
-                <a:latin typeface="Consolas" panose="020B0609020204030204" pitchFamily="49" charset="0"/>
-              </a:rPr>
-              <a:t>userInput</a:t>
-            </a:r>
-            <a:r>
-              <a:rPr lang="de-AT" sz="1800" dirty="0">
-                <a:solidFill>
-                  <a:srgbClr val="000000"/>
-                </a:solidFill>
-                <a:latin typeface="Consolas" panose="020B0609020204030204" pitchFamily="49" charset="0"/>
-              </a:rPr>
-              <a:t> = </a:t>
-            </a:r>
-            <a:r>
-              <a:rPr lang="de-AT" sz="1800" dirty="0" err="1">
-                <a:solidFill>
-                  <a:srgbClr val="000000"/>
-                </a:solidFill>
-                <a:latin typeface="Consolas" panose="020B0609020204030204" pitchFamily="49" charset="0"/>
-              </a:rPr>
-              <a:t>Console.ReadLine</a:t>
-            </a:r>
-            <a:r>
-              <a:rPr lang="de-AT" sz="1800" dirty="0">
-                <a:solidFill>
-                  <a:srgbClr val="000000"/>
-                </a:solidFill>
-                <a:latin typeface="Consolas" panose="020B0609020204030204" pitchFamily="49" charset="0"/>
-              </a:rPr>
-              <a:t>();</a:t>
-            </a:r>
-          </a:p>
-          <a:p>
-            <a:pPr marL="0" indent="0">
-              <a:buNone/>
-            </a:pPr>
-            <a:r>
-              <a:rPr lang="de-AT" sz="1800" dirty="0" err="1">
-                <a:solidFill>
-                  <a:srgbClr val="0000FF"/>
-                </a:solidFill>
-                <a:latin typeface="Consolas" panose="020B0609020204030204" pitchFamily="49" charset="0"/>
-              </a:rPr>
-              <a:t>int</a:t>
-            </a:r>
-            <a:r>
-              <a:rPr lang="de-AT" sz="1800" dirty="0">
-                <a:solidFill>
-                  <a:srgbClr val="000000"/>
-                </a:solidFill>
-                <a:latin typeface="Consolas" panose="020B0609020204030204" pitchFamily="49" charset="0"/>
-              </a:rPr>
-              <a:t> </a:t>
-            </a:r>
-            <a:r>
-              <a:rPr lang="de-AT" sz="1800" dirty="0" err="1">
-                <a:solidFill>
-                  <a:srgbClr val="000000"/>
-                </a:solidFill>
-                <a:latin typeface="Consolas" panose="020B0609020204030204" pitchFamily="49" charset="0"/>
-              </a:rPr>
-              <a:t>age</a:t>
-            </a:r>
-            <a:r>
-              <a:rPr lang="de-AT" sz="1800" dirty="0">
-                <a:solidFill>
-                  <a:srgbClr val="000000"/>
-                </a:solidFill>
-                <a:latin typeface="Consolas" panose="020B0609020204030204" pitchFamily="49" charset="0"/>
-              </a:rPr>
-              <a:t> = Convert.ToInt32(</a:t>
-            </a:r>
-            <a:r>
-              <a:rPr lang="de-AT" sz="1800" dirty="0" err="1">
-                <a:solidFill>
-                  <a:srgbClr val="000000"/>
-                </a:solidFill>
-                <a:latin typeface="Consolas" panose="020B0609020204030204" pitchFamily="49" charset="0"/>
-              </a:rPr>
-              <a:t>userInput</a:t>
-            </a:r>
-            <a:r>
-              <a:rPr lang="de-AT" sz="1800" dirty="0">
-                <a:solidFill>
-                  <a:srgbClr val="000000"/>
-                </a:solidFill>
-                <a:latin typeface="Consolas" panose="020B0609020204030204" pitchFamily="49" charset="0"/>
-              </a:rPr>
-              <a:t>);</a:t>
-            </a:r>
-          </a:p>
-          <a:p>
-            <a:pPr marL="0" indent="0">
-              <a:buNone/>
-            </a:pPr>
-            <a:endParaRPr lang="de-AT" sz="1800" dirty="0">
-              <a:solidFill>
-                <a:srgbClr val="000000"/>
-              </a:solidFill>
-              <a:latin typeface="Consolas" panose="020B0609020204030204" pitchFamily="49" charset="0"/>
-            </a:endParaRPr>
-          </a:p>
-          <a:p>
-            <a:pPr marL="0" indent="0">
-              <a:buNone/>
-            </a:pPr>
-            <a:r>
-              <a:rPr lang="de-AT" sz="1800" dirty="0" err="1">
-                <a:solidFill>
-                  <a:srgbClr val="0000FF"/>
-                </a:solidFill>
-                <a:latin typeface="Consolas" panose="020B0609020204030204" pitchFamily="49" charset="0"/>
-              </a:rPr>
-              <a:t>int</a:t>
-            </a:r>
-            <a:r>
-              <a:rPr lang="de-AT" sz="1800" dirty="0">
-                <a:solidFill>
-                  <a:srgbClr val="000000"/>
-                </a:solidFill>
-                <a:latin typeface="Consolas" panose="020B0609020204030204" pitchFamily="49" charset="0"/>
-              </a:rPr>
-              <a:t> </a:t>
-            </a:r>
-            <a:r>
-              <a:rPr lang="de-AT" sz="1800" dirty="0" err="1">
-                <a:solidFill>
-                  <a:srgbClr val="000000"/>
-                </a:solidFill>
-                <a:latin typeface="Consolas" panose="020B0609020204030204" pitchFamily="49" charset="0"/>
-              </a:rPr>
-              <a:t>diff</a:t>
-            </a:r>
-            <a:r>
-              <a:rPr lang="de-AT" sz="1800" dirty="0">
-                <a:solidFill>
-                  <a:srgbClr val="000000"/>
-                </a:solidFill>
-                <a:latin typeface="Consolas" panose="020B0609020204030204" pitchFamily="49" charset="0"/>
-              </a:rPr>
-              <a:t> = GROWN_UP_AGE - </a:t>
-            </a:r>
-            <a:r>
-              <a:rPr lang="de-AT" sz="1800" dirty="0" err="1">
-                <a:solidFill>
-                  <a:srgbClr val="000000"/>
-                </a:solidFill>
-                <a:latin typeface="Consolas" panose="020B0609020204030204" pitchFamily="49" charset="0"/>
-              </a:rPr>
-              <a:t>age</a:t>
-            </a:r>
-            <a:r>
-              <a:rPr lang="de-AT" sz="1800" dirty="0">
-                <a:solidFill>
-                  <a:srgbClr val="000000"/>
-                </a:solidFill>
-                <a:latin typeface="Consolas" panose="020B0609020204030204" pitchFamily="49" charset="0"/>
-              </a:rPr>
-              <a:t>;</a:t>
-            </a:r>
-          </a:p>
-          <a:p>
-            <a:pPr marL="0" indent="0">
-              <a:buNone/>
-            </a:pPr>
-            <a:endParaRPr lang="de-AT" sz="1800" dirty="0">
-              <a:solidFill>
-                <a:srgbClr val="000000"/>
-              </a:solidFill>
-              <a:latin typeface="Consolas" panose="020B0609020204030204" pitchFamily="49" charset="0"/>
-            </a:endParaRPr>
-          </a:p>
-          <a:p>
-            <a:pPr marL="0" indent="0">
-              <a:buNone/>
-            </a:pPr>
-            <a:r>
-              <a:rPr lang="en-US" sz="1800" dirty="0" err="1">
-                <a:solidFill>
-                  <a:srgbClr val="000000"/>
-                </a:solidFill>
-                <a:latin typeface="Consolas" panose="020B0609020204030204" pitchFamily="49" charset="0"/>
-              </a:rPr>
-              <a:t>Console.WriteLine</a:t>
-            </a:r>
-            <a:r>
-              <a:rPr lang="en-US" sz="1800" dirty="0">
-                <a:solidFill>
-                  <a:srgbClr val="000000"/>
-                </a:solidFill>
-                <a:latin typeface="Consolas" panose="020B0609020204030204" pitchFamily="49" charset="0"/>
-              </a:rPr>
-              <a:t>($</a:t>
-            </a:r>
-            <a:r>
-              <a:rPr lang="en-US" sz="1800" dirty="0">
-                <a:solidFill>
-                  <a:srgbClr val="A31515"/>
-                </a:solidFill>
-                <a:latin typeface="Consolas" panose="020B0609020204030204" pitchFamily="49" charset="0"/>
-              </a:rPr>
-              <a:t>"In approx. </a:t>
-            </a:r>
-            <a:r>
-              <a:rPr lang="en-US" sz="1800" dirty="0">
-                <a:solidFill>
-                  <a:schemeClr val="tx1"/>
-                </a:solidFill>
-                <a:latin typeface="Consolas" panose="020B0609020204030204" pitchFamily="49" charset="0"/>
-              </a:rPr>
-              <a:t>{</a:t>
-            </a:r>
-            <a:r>
-              <a:rPr lang="en-US" sz="1800" dirty="0">
-                <a:solidFill>
-                  <a:srgbClr val="000000"/>
-                </a:solidFill>
-                <a:latin typeface="Consolas" panose="020B0609020204030204" pitchFamily="49" charset="0"/>
-              </a:rPr>
-              <a:t>diff}</a:t>
-            </a:r>
-            <a:r>
-              <a:rPr lang="en-US" sz="1800" dirty="0">
-                <a:solidFill>
-                  <a:srgbClr val="A31515"/>
-                </a:solidFill>
-                <a:latin typeface="Consolas" panose="020B0609020204030204" pitchFamily="49" charset="0"/>
-              </a:rPr>
-              <a:t> years you will be grown-up"</a:t>
-            </a:r>
-            <a:r>
-              <a:rPr lang="en-US" sz="1800" dirty="0">
-                <a:solidFill>
-                  <a:srgbClr val="000000"/>
-                </a:solidFill>
-                <a:latin typeface="Consolas" panose="020B0609020204030204" pitchFamily="49" charset="0"/>
-              </a:rPr>
-              <a:t>);</a:t>
-            </a:r>
-          </a:p>
-          <a:p>
-            <a:pPr marL="0" indent="0" defTabSz="402536">
-              <a:lnSpc>
-                <a:spcPct val="50000"/>
-              </a:lnSpc>
-              <a:spcBef>
-                <a:spcPts val="1406"/>
-              </a:spcBef>
-              <a:buSzTx/>
-              <a:buNone/>
-              <a:defRPr sz="1800"/>
-            </a:pPr>
-            <a:endParaRPr sz="2067" dirty="0">
-              <a:latin typeface="Courier New" panose="02070309020205020404" pitchFamily="49" charset="0"/>
-              <a:ea typeface="Monaco"/>
-              <a:cs typeface="Courier New" panose="02070309020205020404" pitchFamily="49" charset="0"/>
-              <a:sym typeface="Monaco"/>
-            </a:endParaRPr>
-          </a:p>
-        </p:txBody>
-      </p:sp>
-      <p:sp>
-        <p:nvSpPr>
-          <p:cNvPr id="2" name="Titel 1"/>
-          <p:cNvSpPr>
-            <a:spLocks noGrp="1"/>
-          </p:cNvSpPr>
-          <p:nvPr>
-            <p:ph type="title"/>
-          </p:nvPr>
-        </p:nvSpPr>
-        <p:spPr/>
-        <p:txBody>
-          <a:bodyPr/>
-          <a:lstStyle/>
-          <a:p>
-            <a:r>
-              <a:rPr lang="de-AT" dirty="0"/>
-              <a:t>Der einfache Teil</a:t>
-            </a:r>
-          </a:p>
-        </p:txBody>
-      </p:sp>
-    </p:spTree>
-    <p:extLst>
-      <p:ext uri="{BB962C8B-B14F-4D97-AF65-F5344CB8AC3E}">
-        <p14:creationId xmlns:p14="http://schemas.microsoft.com/office/powerpoint/2010/main" val="805754609"/>
-      </p:ext>
-    </p:extLst>
-  </p:cSld>
-  <p:clrMapOvr>
-    <a:masterClrMapping/>
-  </p:clrMapOvr>
-  <p:transition spd="med"/>
-</p:sld>
-</file>
-
-<file path=ppt/slides/slide20.xml><?xml version="1.0" encoding="utf-8"?>
+<file path=ppt/slides/slide19.xml><?xml version="1.0" encoding="utf-8"?>
 <p:sld xmlns:a="http://schemas.openxmlformats.org/drawingml/2006/main" xmlns:r="http://schemas.openxmlformats.org/officeDocument/2006/relationships" xmlns:p="http://schemas.openxmlformats.org/presentationml/2006/main">
   <p:cSld>
     <p:spTree>
@@ -9571,7 +8582,499 @@
 </p:sld>
 </file>
 
-<file path=ppt/slides/slide21.xml><?xml version="1.0" encoding="utf-8"?>
+<file path=ppt/slides/slide2.xml><?xml version="1.0" encoding="utf-8"?>
+<p:sld xmlns:a="http://schemas.openxmlformats.org/drawingml/2006/main" xmlns:r="http://schemas.openxmlformats.org/officeDocument/2006/relationships" xmlns:p="http://schemas.openxmlformats.org/presentationml/2006/main">
+  <p:cSld>
+    <p:spTree>
+      <p:nvGrpSpPr>
+        <p:cNvPr id="1" name=""/>
+        <p:cNvGrpSpPr/>
+        <p:nvPr/>
+      </p:nvGrpSpPr>
+      <p:grpSpPr>
+        <a:xfrm>
+          <a:off x="0" y="0"/>
+          <a:ext cx="0" cy="0"/>
+          <a:chOff x="0" y="0"/>
+          <a:chExt cx="0" cy="0"/>
+        </a:xfrm>
+      </p:grpSpPr>
+      <p:sp>
+        <p:nvSpPr>
+          <p:cNvPr id="72" name="Shape 72"/>
+          <p:cNvSpPr>
+            <a:spLocks noGrp="1"/>
+          </p:cNvSpPr>
+          <p:nvPr>
+            <p:ph type="body" idx="1"/>
+          </p:nvPr>
+        </p:nvSpPr>
+        <p:spPr>
+          <a:xfrm>
+            <a:off x="250031" y="1484784"/>
+            <a:ext cx="8643938" cy="4772645"/>
+          </a:xfrm>
+          <a:prstGeom prst="rect">
+            <a:avLst/>
+          </a:prstGeom>
+        </p:spPr>
+        <p:txBody>
+          <a:bodyPr lIns="0" tIns="0" rIns="0" bIns="0">
+            <a:normAutofit/>
+          </a:bodyPr>
+          <a:lstStyle/>
+          <a:p>
+            <a:pPr marL="0" indent="0">
+              <a:buNone/>
+            </a:pPr>
+            <a:r>
+              <a:rPr lang="de-AT" sz="1800" dirty="0" err="1">
+                <a:solidFill>
+                  <a:srgbClr val="0000FF"/>
+                </a:solidFill>
+                <a:latin typeface="Consolas" panose="020B0609020204030204" pitchFamily="49" charset="0"/>
+              </a:rPr>
+              <a:t>using</a:t>
+            </a:r>
+            <a:r>
+              <a:rPr lang="de-AT" sz="1800" dirty="0">
+                <a:solidFill>
+                  <a:srgbClr val="000000"/>
+                </a:solidFill>
+                <a:latin typeface="Consolas" panose="020B0609020204030204" pitchFamily="49" charset="0"/>
+              </a:rPr>
+              <a:t> System;</a:t>
+            </a:r>
+          </a:p>
+          <a:p>
+            <a:pPr marL="0" indent="0">
+              <a:buNone/>
+            </a:pPr>
+            <a:endParaRPr lang="de-AT" sz="1800" dirty="0">
+              <a:solidFill>
+                <a:srgbClr val="000000"/>
+              </a:solidFill>
+              <a:latin typeface="Consolas" panose="020B0609020204030204" pitchFamily="49" charset="0"/>
+            </a:endParaRPr>
+          </a:p>
+          <a:p>
+            <a:pPr marL="0" indent="0">
+              <a:buNone/>
+            </a:pPr>
+            <a:r>
+              <a:rPr lang="de-AT" sz="1800" dirty="0" err="1">
+                <a:solidFill>
+                  <a:srgbClr val="0000FF"/>
+                </a:solidFill>
+                <a:latin typeface="Consolas" panose="020B0609020204030204" pitchFamily="49" charset="0"/>
+              </a:rPr>
+              <a:t>const</a:t>
+            </a:r>
+            <a:r>
+              <a:rPr lang="de-AT" sz="1800" dirty="0">
+                <a:solidFill>
+                  <a:srgbClr val="000000"/>
+                </a:solidFill>
+                <a:latin typeface="Consolas" panose="020B0609020204030204" pitchFamily="49" charset="0"/>
+              </a:rPr>
+              <a:t> </a:t>
+            </a:r>
+            <a:r>
+              <a:rPr lang="de-AT" sz="1800" dirty="0" err="1">
+                <a:solidFill>
+                  <a:srgbClr val="0000FF"/>
+                </a:solidFill>
+                <a:latin typeface="Consolas" panose="020B0609020204030204" pitchFamily="49" charset="0"/>
+              </a:rPr>
+              <a:t>int</a:t>
+            </a:r>
+            <a:r>
+              <a:rPr lang="de-AT" sz="1800" dirty="0">
+                <a:solidFill>
+                  <a:srgbClr val="000000"/>
+                </a:solidFill>
+                <a:latin typeface="Consolas" panose="020B0609020204030204" pitchFamily="49" charset="0"/>
+              </a:rPr>
+              <a:t> GROWN_UP_AGE = 18;</a:t>
+            </a:r>
+          </a:p>
+          <a:p>
+            <a:pPr marL="0" indent="0">
+              <a:buNone/>
+            </a:pPr>
+            <a:endParaRPr lang="de-AT" sz="1800" dirty="0">
+              <a:solidFill>
+                <a:srgbClr val="000000"/>
+              </a:solidFill>
+              <a:latin typeface="Consolas" panose="020B0609020204030204" pitchFamily="49" charset="0"/>
+            </a:endParaRPr>
+          </a:p>
+          <a:p>
+            <a:pPr marL="0" indent="0">
+              <a:buNone/>
+            </a:pPr>
+            <a:r>
+              <a:rPr lang="en-US" sz="1800" dirty="0" err="1">
+                <a:solidFill>
+                  <a:srgbClr val="000000"/>
+                </a:solidFill>
+                <a:latin typeface="Consolas" panose="020B0609020204030204" pitchFamily="49" charset="0"/>
+              </a:rPr>
+              <a:t>Console.Write</a:t>
+            </a:r>
+            <a:r>
+              <a:rPr lang="en-US" sz="1800" dirty="0">
+                <a:solidFill>
+                  <a:srgbClr val="000000"/>
+                </a:solidFill>
+                <a:latin typeface="Consolas" panose="020B0609020204030204" pitchFamily="49" charset="0"/>
+              </a:rPr>
+              <a:t>(</a:t>
+            </a:r>
+            <a:r>
+              <a:rPr lang="en-US" sz="1800" dirty="0">
+                <a:solidFill>
+                  <a:srgbClr val="A31515"/>
+                </a:solidFill>
+                <a:latin typeface="Consolas" panose="020B0609020204030204" pitchFamily="49" charset="0"/>
+              </a:rPr>
+              <a:t>"How old are you? "</a:t>
+            </a:r>
+            <a:r>
+              <a:rPr lang="en-US" sz="1800" dirty="0">
+                <a:solidFill>
+                  <a:srgbClr val="000000"/>
+                </a:solidFill>
+                <a:latin typeface="Consolas" panose="020B0609020204030204" pitchFamily="49" charset="0"/>
+              </a:rPr>
+              <a:t>);</a:t>
+            </a:r>
+          </a:p>
+          <a:p>
+            <a:pPr marL="0" indent="0">
+              <a:buNone/>
+            </a:pPr>
+            <a:r>
+              <a:rPr lang="de-AT" sz="1800" dirty="0" err="1">
+                <a:solidFill>
+                  <a:srgbClr val="0000FF"/>
+                </a:solidFill>
+                <a:latin typeface="Consolas" panose="020B0609020204030204" pitchFamily="49" charset="0"/>
+              </a:rPr>
+              <a:t>string</a:t>
+            </a:r>
+            <a:r>
+              <a:rPr lang="de-AT" sz="1800" dirty="0">
+                <a:solidFill>
+                  <a:srgbClr val="000000"/>
+                </a:solidFill>
+                <a:latin typeface="Consolas" panose="020B0609020204030204" pitchFamily="49" charset="0"/>
+              </a:rPr>
+              <a:t> </a:t>
+            </a:r>
+            <a:r>
+              <a:rPr lang="de-AT" sz="1800" dirty="0" err="1">
+                <a:solidFill>
+                  <a:srgbClr val="000000"/>
+                </a:solidFill>
+                <a:latin typeface="Consolas" panose="020B0609020204030204" pitchFamily="49" charset="0"/>
+              </a:rPr>
+              <a:t>userInput</a:t>
+            </a:r>
+            <a:r>
+              <a:rPr lang="de-AT" sz="1800" dirty="0">
+                <a:solidFill>
+                  <a:srgbClr val="000000"/>
+                </a:solidFill>
+                <a:latin typeface="Consolas" panose="020B0609020204030204" pitchFamily="49" charset="0"/>
+              </a:rPr>
+              <a:t> = </a:t>
+            </a:r>
+            <a:r>
+              <a:rPr lang="de-AT" sz="1800" dirty="0" err="1">
+                <a:solidFill>
+                  <a:srgbClr val="000000"/>
+                </a:solidFill>
+                <a:latin typeface="Consolas" panose="020B0609020204030204" pitchFamily="49" charset="0"/>
+              </a:rPr>
+              <a:t>Console.ReadLine</a:t>
+            </a:r>
+            <a:r>
+              <a:rPr lang="de-AT" sz="1800" dirty="0">
+                <a:solidFill>
+                  <a:srgbClr val="000000"/>
+                </a:solidFill>
+                <a:latin typeface="Consolas" panose="020B0609020204030204" pitchFamily="49" charset="0"/>
+              </a:rPr>
+              <a:t>();</a:t>
+            </a:r>
+          </a:p>
+          <a:p>
+            <a:pPr marL="0" indent="0">
+              <a:buNone/>
+            </a:pPr>
+            <a:r>
+              <a:rPr lang="de-AT" sz="1800" dirty="0" err="1">
+                <a:solidFill>
+                  <a:srgbClr val="0000FF"/>
+                </a:solidFill>
+                <a:latin typeface="Consolas" panose="020B0609020204030204" pitchFamily="49" charset="0"/>
+              </a:rPr>
+              <a:t>int</a:t>
+            </a:r>
+            <a:r>
+              <a:rPr lang="de-AT" sz="1800" dirty="0">
+                <a:solidFill>
+                  <a:srgbClr val="000000"/>
+                </a:solidFill>
+                <a:latin typeface="Consolas" panose="020B0609020204030204" pitchFamily="49" charset="0"/>
+              </a:rPr>
+              <a:t> </a:t>
+            </a:r>
+            <a:r>
+              <a:rPr lang="de-AT" sz="1800" dirty="0" err="1">
+                <a:solidFill>
+                  <a:srgbClr val="000000"/>
+                </a:solidFill>
+                <a:latin typeface="Consolas" panose="020B0609020204030204" pitchFamily="49" charset="0"/>
+              </a:rPr>
+              <a:t>age</a:t>
+            </a:r>
+            <a:r>
+              <a:rPr lang="de-AT" sz="1800" dirty="0">
+                <a:solidFill>
+                  <a:srgbClr val="000000"/>
+                </a:solidFill>
+                <a:latin typeface="Consolas" panose="020B0609020204030204" pitchFamily="49" charset="0"/>
+              </a:rPr>
+              <a:t> = Convert.ToInt32(</a:t>
+            </a:r>
+            <a:r>
+              <a:rPr lang="de-AT" sz="1800" dirty="0" err="1">
+                <a:solidFill>
+                  <a:srgbClr val="000000"/>
+                </a:solidFill>
+                <a:latin typeface="Consolas" panose="020B0609020204030204" pitchFamily="49" charset="0"/>
+              </a:rPr>
+              <a:t>userInput</a:t>
+            </a:r>
+            <a:r>
+              <a:rPr lang="de-AT" sz="1800" dirty="0">
+                <a:solidFill>
+                  <a:srgbClr val="000000"/>
+                </a:solidFill>
+                <a:latin typeface="Consolas" panose="020B0609020204030204" pitchFamily="49" charset="0"/>
+              </a:rPr>
+              <a:t>);</a:t>
+            </a:r>
+          </a:p>
+          <a:p>
+            <a:pPr marL="0" indent="0">
+              <a:buNone/>
+            </a:pPr>
+            <a:endParaRPr lang="de-AT" sz="1800" dirty="0">
+              <a:solidFill>
+                <a:srgbClr val="000000"/>
+              </a:solidFill>
+              <a:latin typeface="Consolas" panose="020B0609020204030204" pitchFamily="49" charset="0"/>
+            </a:endParaRPr>
+          </a:p>
+          <a:p>
+            <a:pPr marL="0" indent="0">
+              <a:buNone/>
+            </a:pPr>
+            <a:r>
+              <a:rPr lang="de-AT" sz="1800" dirty="0" err="1">
+                <a:solidFill>
+                  <a:srgbClr val="0000FF"/>
+                </a:solidFill>
+                <a:latin typeface="Consolas" panose="020B0609020204030204" pitchFamily="49" charset="0"/>
+              </a:rPr>
+              <a:t>int</a:t>
+            </a:r>
+            <a:r>
+              <a:rPr lang="de-AT" sz="1800" dirty="0">
+                <a:solidFill>
+                  <a:srgbClr val="000000"/>
+                </a:solidFill>
+                <a:latin typeface="Consolas" panose="020B0609020204030204" pitchFamily="49" charset="0"/>
+              </a:rPr>
+              <a:t> </a:t>
+            </a:r>
+            <a:r>
+              <a:rPr lang="de-AT" sz="1800" dirty="0" err="1">
+                <a:solidFill>
+                  <a:srgbClr val="000000"/>
+                </a:solidFill>
+                <a:latin typeface="Consolas" panose="020B0609020204030204" pitchFamily="49" charset="0"/>
+              </a:rPr>
+              <a:t>diff</a:t>
+            </a:r>
+            <a:r>
+              <a:rPr lang="de-AT" sz="1800" dirty="0">
+                <a:solidFill>
+                  <a:srgbClr val="000000"/>
+                </a:solidFill>
+                <a:latin typeface="Consolas" panose="020B0609020204030204" pitchFamily="49" charset="0"/>
+              </a:rPr>
+              <a:t> = GROWN_UP_AGE - </a:t>
+            </a:r>
+            <a:r>
+              <a:rPr lang="de-AT" sz="1800" dirty="0" err="1">
+                <a:solidFill>
+                  <a:srgbClr val="000000"/>
+                </a:solidFill>
+                <a:latin typeface="Consolas" panose="020B0609020204030204" pitchFamily="49" charset="0"/>
+              </a:rPr>
+              <a:t>age</a:t>
+            </a:r>
+            <a:r>
+              <a:rPr lang="de-AT" sz="1800" dirty="0">
+                <a:solidFill>
+                  <a:srgbClr val="000000"/>
+                </a:solidFill>
+                <a:latin typeface="Consolas" panose="020B0609020204030204" pitchFamily="49" charset="0"/>
+              </a:rPr>
+              <a:t>;</a:t>
+            </a:r>
+          </a:p>
+          <a:p>
+            <a:pPr marL="0" indent="0">
+              <a:buNone/>
+            </a:pPr>
+            <a:endParaRPr lang="de-AT" sz="1800" dirty="0">
+              <a:solidFill>
+                <a:srgbClr val="000000"/>
+              </a:solidFill>
+              <a:latin typeface="Consolas" panose="020B0609020204030204" pitchFamily="49" charset="0"/>
+            </a:endParaRPr>
+          </a:p>
+          <a:p>
+            <a:pPr marL="0" indent="0">
+              <a:buNone/>
+            </a:pPr>
+            <a:r>
+              <a:rPr lang="en-US" sz="1800" dirty="0" err="1">
+                <a:solidFill>
+                  <a:srgbClr val="000000"/>
+                </a:solidFill>
+                <a:latin typeface="Consolas" panose="020B0609020204030204" pitchFamily="49" charset="0"/>
+              </a:rPr>
+              <a:t>Console.WriteLine</a:t>
+            </a:r>
+            <a:r>
+              <a:rPr lang="en-US" sz="1800" dirty="0">
+                <a:solidFill>
+                  <a:srgbClr val="000000"/>
+                </a:solidFill>
+                <a:latin typeface="Consolas" panose="020B0609020204030204" pitchFamily="49" charset="0"/>
+              </a:rPr>
+              <a:t>($</a:t>
+            </a:r>
+            <a:r>
+              <a:rPr lang="en-US" sz="1800" dirty="0">
+                <a:solidFill>
+                  <a:srgbClr val="A31515"/>
+                </a:solidFill>
+                <a:latin typeface="Consolas" panose="020B0609020204030204" pitchFamily="49" charset="0"/>
+              </a:rPr>
+              <a:t>"In approx. </a:t>
+            </a:r>
+            <a:r>
+              <a:rPr lang="en-US" sz="1800" dirty="0">
+                <a:solidFill>
+                  <a:schemeClr val="tx1"/>
+                </a:solidFill>
+                <a:latin typeface="Consolas" panose="020B0609020204030204" pitchFamily="49" charset="0"/>
+              </a:rPr>
+              <a:t>{</a:t>
+            </a:r>
+            <a:r>
+              <a:rPr lang="en-US" sz="1800" dirty="0">
+                <a:solidFill>
+                  <a:srgbClr val="000000"/>
+                </a:solidFill>
+                <a:latin typeface="Consolas" panose="020B0609020204030204" pitchFamily="49" charset="0"/>
+              </a:rPr>
+              <a:t>diff}</a:t>
+            </a:r>
+            <a:r>
+              <a:rPr lang="en-US" sz="1800" dirty="0">
+                <a:solidFill>
+                  <a:srgbClr val="A31515"/>
+                </a:solidFill>
+                <a:latin typeface="Consolas" panose="020B0609020204030204" pitchFamily="49" charset="0"/>
+              </a:rPr>
+              <a:t> years you will be grown-up"</a:t>
+            </a:r>
+            <a:r>
+              <a:rPr lang="en-US" sz="1800" dirty="0">
+                <a:solidFill>
+                  <a:srgbClr val="000000"/>
+                </a:solidFill>
+                <a:latin typeface="Consolas" panose="020B0609020204030204" pitchFamily="49" charset="0"/>
+              </a:rPr>
+              <a:t>);</a:t>
+            </a:r>
+          </a:p>
+          <a:p>
+            <a:pPr marL="0" indent="0" defTabSz="402536">
+              <a:lnSpc>
+                <a:spcPct val="50000"/>
+              </a:lnSpc>
+              <a:spcBef>
+                <a:spcPts val="1406"/>
+              </a:spcBef>
+              <a:buSzTx/>
+              <a:buNone/>
+              <a:defRPr sz="1800"/>
+            </a:pPr>
+            <a:endParaRPr sz="2067" dirty="0">
+              <a:latin typeface="Courier New" panose="02070309020205020404" pitchFamily="49" charset="0"/>
+              <a:ea typeface="Monaco"/>
+              <a:cs typeface="Courier New" panose="02070309020205020404" pitchFamily="49" charset="0"/>
+              <a:sym typeface="Monaco"/>
+            </a:endParaRPr>
+          </a:p>
+        </p:txBody>
+      </p:sp>
+      <p:sp>
+        <p:nvSpPr>
+          <p:cNvPr id="2" name="Titel 1"/>
+          <p:cNvSpPr>
+            <a:spLocks noGrp="1"/>
+          </p:cNvSpPr>
+          <p:nvPr>
+            <p:ph type="title"/>
+          </p:nvPr>
+        </p:nvSpPr>
+        <p:spPr/>
+        <p:txBody>
+          <a:bodyPr/>
+          <a:lstStyle/>
+          <a:p>
+            <a:r>
+              <a:rPr lang="de-AT" dirty="0"/>
+              <a:t>Der einfache Teil</a:t>
+            </a:r>
+          </a:p>
+        </p:txBody>
+      </p:sp>
+    </p:spTree>
+    <p:extLst>
+      <p:ext uri="{BB962C8B-B14F-4D97-AF65-F5344CB8AC3E}">
+        <p14:creationId xmlns:p14="http://schemas.microsoft.com/office/powerpoint/2010/main" val="805754609"/>
+      </p:ext>
+    </p:extLst>
+  </p:cSld>
+  <p:clrMapOvr>
+    <a:masterClrMapping/>
+  </p:clrMapOvr>
+  <p:transition spd="med"/>
+</p:sld>
+</file>
+
+<file path=ppt/slides/slide20.xml><?xml version="1.0" encoding="utf-8"?>
 <p:sld xmlns:a="http://schemas.openxmlformats.org/drawingml/2006/main" xmlns:r="http://schemas.openxmlformats.org/officeDocument/2006/relationships" xmlns:p="http://schemas.openxmlformats.org/presentationml/2006/main">
   <p:cSld>
     <p:spTree>
@@ -10848,7 +10351,7 @@
 </p:sld>
 </file>
 
-<file path=ppt/slides/slide22.xml><?xml version="1.0" encoding="utf-8"?>
+<file path=ppt/slides/slide21.xml><?xml version="1.0" encoding="utf-8"?>
 <p:sld xmlns:a="http://schemas.openxmlformats.org/drawingml/2006/main" xmlns:r="http://schemas.openxmlformats.org/officeDocument/2006/relationships" xmlns:p="http://schemas.openxmlformats.org/presentationml/2006/main">
   <p:cSld>
     <p:bg>
@@ -11843,7 +11346,7 @@
 </p:sld>
 </file>
 
-<file path=ppt/slides/slide23.xml><?xml version="1.0" encoding="utf-8"?>
+<file path=ppt/slides/slide22.xml><?xml version="1.0" encoding="utf-8"?>
 <p:sld xmlns:a="http://schemas.openxmlformats.org/drawingml/2006/main" xmlns:r="http://schemas.openxmlformats.org/officeDocument/2006/relationships" xmlns:p="http://schemas.openxmlformats.org/presentationml/2006/main">
   <p:cSld>
     <p:bg>
@@ -12570,383 +12073,6 @@
       </p:grpSpPr>
       <p:sp>
         <p:nvSpPr>
-          <p:cNvPr id="82" name="Shape 82"/>
-          <p:cNvSpPr/>
-          <p:nvPr/>
-        </p:nvSpPr>
-        <p:spPr>
-          <a:xfrm>
-            <a:off x="4402281" y="1016732"/>
-            <a:ext cx="72200" cy="396712"/>
-          </a:xfrm>
-          <a:prstGeom prst="rect">
-            <a:avLst/>
-          </a:prstGeom>
-          <a:ln w="12700">
-            <a:miter lim="400000"/>
-          </a:ln>
-          <a:extLst>
-            <a:ext uri="{C572A759-6A51-4108-AA02-DFA0A04FC94B}">
-              <ma14:wrappingTextBoxFlag xmlns="" xmlns:ma14="http://schemas.microsoft.com/office/mac/drawingml/2011/main" val="1"/>
-            </a:ext>
-          </a:extLst>
-        </p:spPr>
-        <p:txBody>
-          <a:bodyPr wrap="none" lIns="35719" tIns="35719" rIns="35719" bIns="35719" anchor="ctr">
-            <a:spAutoFit/>
-          </a:bodyPr>
-          <a:lstStyle/>
-          <a:p>
-            <a:pPr lvl="0">
-              <a:defRPr sz="1800">
-                <a:solidFill>
-                  <a:srgbClr val="000000"/>
-                </a:solidFill>
-              </a:defRPr>
-            </a:pPr>
-            <a:endParaRPr sz="2109" dirty="0">
-              <a:solidFill>
-                <a:srgbClr val="324863"/>
-              </a:solidFill>
-            </a:endParaRPr>
-          </a:p>
-        </p:txBody>
-      </p:sp>
-      <p:sp>
-        <p:nvSpPr>
-          <p:cNvPr id="2" name="Titel 1"/>
-          <p:cNvSpPr>
-            <a:spLocks noGrp="1"/>
-          </p:cNvSpPr>
-          <p:nvPr>
-            <p:ph type="title"/>
-          </p:nvPr>
-        </p:nvSpPr>
-        <p:spPr/>
-        <p:txBody>
-          <a:bodyPr/>
-          <a:lstStyle/>
-          <a:p>
-            <a:r>
-              <a:rPr lang="de-AT" dirty="0"/>
-              <a:t>Ablaufdiagramm / </a:t>
-            </a:r>
-            <a:r>
-              <a:rPr lang="de-AT" dirty="0" err="1"/>
-              <a:t>Flowchart</a:t>
-            </a:r>
-            <a:endParaRPr lang="de-AT" dirty="0"/>
-          </a:p>
-        </p:txBody>
-      </p:sp>
-      <p:sp>
-        <p:nvSpPr>
-          <p:cNvPr id="3" name="Textfeld 2"/>
-          <p:cNvSpPr txBox="1"/>
-          <p:nvPr/>
-        </p:nvSpPr>
-        <p:spPr>
-          <a:xfrm>
-            <a:off x="215516" y="1268413"/>
-            <a:ext cx="5917004" cy="5355312"/>
-          </a:xfrm>
-          <a:prstGeom prst="rect">
-            <a:avLst/>
-          </a:prstGeom>
-          <a:noFill/>
-        </p:spPr>
-        <p:txBody>
-          <a:bodyPr wrap="none" rtlCol="0">
-            <a:spAutoFit/>
-          </a:bodyPr>
-          <a:lstStyle/>
-          <a:p>
-            <a:pPr marL="342900" indent="-342900">
-              <a:buFont typeface="+mj-lt"/>
-              <a:buAutoNum type="arabicPeriod"/>
-            </a:pPr>
-            <a:r>
-              <a:rPr lang="de-AT" dirty="0">
-                <a:hlinkClick r:id="rId2"/>
-              </a:rPr>
-              <a:t>https://app.diagrams.net</a:t>
-            </a:r>
-            <a:br>
-              <a:rPr lang="de-AT" dirty="0"/>
-            </a:br>
-            <a:endParaRPr lang="de-AT" dirty="0"/>
-          </a:p>
-          <a:p>
-            <a:pPr marL="342900" indent="-342900">
-              <a:buFont typeface="+mj-lt"/>
-              <a:buAutoNum type="arabicPeriod"/>
-            </a:pPr>
-            <a:r>
-              <a:rPr lang="de-AT" dirty="0"/>
-              <a:t>Create New </a:t>
-            </a:r>
-            <a:r>
-              <a:rPr lang="de-AT" dirty="0" err="1"/>
-              <a:t>Diagram</a:t>
-            </a:r>
-            <a:br>
-              <a:rPr lang="de-AT" dirty="0"/>
-            </a:br>
-            <a:br>
-              <a:rPr lang="de-AT" dirty="0"/>
-            </a:br>
-            <a:br>
-              <a:rPr lang="de-AT" dirty="0"/>
-            </a:br>
-            <a:br>
-              <a:rPr lang="de-AT" dirty="0"/>
-            </a:br>
-            <a:br>
-              <a:rPr lang="de-AT" dirty="0"/>
-            </a:br>
-            <a:br>
-              <a:rPr lang="de-AT" dirty="0"/>
-            </a:br>
-            <a:br>
-              <a:rPr lang="de-AT" dirty="0"/>
-            </a:br>
-            <a:endParaRPr lang="de-AT" dirty="0"/>
-          </a:p>
-          <a:p>
-            <a:pPr marL="342900" indent="-342900">
-              <a:buFont typeface="+mj-lt"/>
-              <a:buAutoNum type="arabicPeriod"/>
-            </a:pPr>
-            <a:r>
-              <a:rPr lang="de-AT" dirty="0"/>
-              <a:t>Select „</a:t>
-            </a:r>
-            <a:r>
-              <a:rPr lang="de-AT" dirty="0" err="1"/>
-              <a:t>Flowcharts</a:t>
-            </a:r>
-            <a:r>
-              <a:rPr lang="de-AT" dirty="0"/>
-              <a:t>“</a:t>
-            </a:r>
-            <a:br>
-              <a:rPr lang="de-AT" dirty="0"/>
-            </a:br>
-            <a:endParaRPr lang="de-AT" dirty="0"/>
-          </a:p>
-          <a:p>
-            <a:pPr marL="342900" indent="-342900">
-              <a:buFont typeface="+mj-lt"/>
-              <a:buAutoNum type="arabicPeriod"/>
-            </a:pPr>
-            <a:r>
-              <a:rPr lang="de-AT" dirty="0"/>
-              <a:t>Press „Create“</a:t>
-            </a:r>
-            <a:br>
-              <a:rPr lang="de-AT" dirty="0"/>
-            </a:br>
-            <a:endParaRPr lang="de-AT" dirty="0"/>
-          </a:p>
-          <a:p>
-            <a:pPr marL="342900" indent="-342900">
-              <a:buFont typeface="+mj-lt"/>
-              <a:buAutoNum type="arabicPeriod"/>
-            </a:pPr>
-            <a:r>
-              <a:rPr lang="de-AT" dirty="0"/>
-              <a:t>Draw </a:t>
-            </a:r>
-            <a:r>
-              <a:rPr lang="de-AT" dirty="0" err="1"/>
-              <a:t>diagram</a:t>
-            </a:r>
-            <a:br>
-              <a:rPr lang="de-AT" dirty="0"/>
-            </a:br>
-            <a:br>
-              <a:rPr lang="de-AT" dirty="0"/>
-            </a:br>
-            <a:endParaRPr lang="de-AT" dirty="0"/>
-          </a:p>
-          <a:p>
-            <a:r>
-              <a:rPr lang="de-AT" dirty="0"/>
-              <a:t>Oder: https://github.com/jgraph/drawio-desktop/releases</a:t>
-            </a:r>
-            <a:br>
-              <a:rPr lang="de-AT" dirty="0"/>
-            </a:br>
-            <a:endParaRPr lang="de-AT" dirty="0"/>
-          </a:p>
-        </p:txBody>
-      </p:sp>
-      <p:pic>
-        <p:nvPicPr>
-          <p:cNvPr id="4" name="Grafik 3"/>
-          <p:cNvPicPr>
-            <a:picLocks noChangeAspect="1"/>
-          </p:cNvPicPr>
-          <p:nvPr/>
-        </p:nvPicPr>
-        <p:blipFill>
-          <a:blip r:embed="rId3"/>
-          <a:stretch>
-            <a:fillRect/>
-          </a:stretch>
-        </p:blipFill>
-        <p:spPr>
-          <a:xfrm>
-            <a:off x="1511660" y="2348880"/>
-            <a:ext cx="1943371" cy="1433713"/>
-          </a:xfrm>
-          <a:prstGeom prst="rect">
-            <a:avLst/>
-          </a:prstGeom>
-        </p:spPr>
-      </p:pic>
-      <p:pic>
-        <p:nvPicPr>
-          <p:cNvPr id="5" name="Grafik 4"/>
-          <p:cNvPicPr>
-            <a:picLocks noChangeAspect="1"/>
-          </p:cNvPicPr>
-          <p:nvPr/>
-        </p:nvPicPr>
-        <p:blipFill>
-          <a:blip r:embed="rId4"/>
-          <a:stretch>
-            <a:fillRect/>
-          </a:stretch>
-        </p:blipFill>
-        <p:spPr>
-          <a:xfrm>
-            <a:off x="3563888" y="1908048"/>
-            <a:ext cx="5464048" cy="3749090"/>
-          </a:xfrm>
-          <a:prstGeom prst="rect">
-            <a:avLst/>
-          </a:prstGeom>
-        </p:spPr>
-      </p:pic>
-    </p:spTree>
-    <p:extLst>
-      <p:ext uri="{BB962C8B-B14F-4D97-AF65-F5344CB8AC3E}">
-        <p14:creationId xmlns:p14="http://schemas.microsoft.com/office/powerpoint/2010/main" val="1573956344"/>
-      </p:ext>
-    </p:extLst>
-  </p:cSld>
-  <p:clrMapOvr>
-    <a:masterClrMapping/>
-  </p:clrMapOvr>
-  <p:transition spd="med"/>
-  <p:timing>
-    <p:tnLst>
-      <p:par>
-        <p:cTn id="1" dur="indefinite" restart="never" fill="hold" nodeType="tmRoot">
-          <p:childTnLst>
-            <p:seq concurrent="1" prevAc="none" nextAc="seek">
-              <p:cTn id="2" dur="indefinite" fill="hold" nodeType="mainSeq">
-                <p:childTnLst>
-                  <p:par>
-                    <p:cTn id="3" fill="hold">
-                      <p:stCondLst>
-                        <p:cond delay="indefinite"/>
-                      </p:stCondLst>
-                      <p:childTnLst>
-                        <p:par>
-                          <p:cTn id="4" fill="hold">
-                            <p:stCondLst>
-                              <p:cond delay="0"/>
-                            </p:stCondLst>
-                            <p:childTnLst>
-                              <p:par>
-                                <p:cTn id="5" presetID="22" presetClass="entr" presetSubtype="1" fill="hold" grpId="0" nodeType="clickEffect">
-                                  <p:stCondLst>
-                                    <p:cond delay="0"/>
-                                  </p:stCondLst>
-                                  <p:iterate>
-                                    <p:tmAbs val="0"/>
-                                  </p:iterate>
-                                  <p:childTnLst>
-                                    <p:set>
-                                      <p:cBhvr>
-                                        <p:cTn id="6" fill="hold"/>
-                                        <p:tgtEl>
-                                          <p:spTgt spid="82"/>
-                                        </p:tgtEl>
-                                        <p:attrNameLst>
-                                          <p:attrName>style.visibility</p:attrName>
-                                        </p:attrNameLst>
-                                      </p:cBhvr>
-                                      <p:to>
-                                        <p:strVal val="visible"/>
-                                      </p:to>
-                                    </p:set>
-                                    <p:animEffect transition="in" filter="wipe(up)">
-                                      <p:cBhvr>
-                                        <p:cTn id="7" dur="1000"/>
-                                        <p:tgtEl>
-                                          <p:spTgt spid="82"/>
-                                        </p:tgtEl>
-                                      </p:cBhvr>
-                                    </p:animEffect>
-                                  </p:childTnLst>
-                                </p:cTn>
-                              </p:par>
-                            </p:childTnLst>
-                          </p:cTn>
-                        </p:par>
-                      </p:childTnLst>
-                    </p:cTn>
-                  </p:par>
-                </p:childTnLst>
-              </p:cTn>
-              <p:prevCondLst>
-                <p:cond evt="onPrev" delay="0">
-                  <p:tgtEl>
-                    <p:sldTgt/>
-                  </p:tgtEl>
-                </p:cond>
-              </p:prevCondLst>
-              <p:nextCondLst>
-                <p:cond evt="onNext" delay="0">
-                  <p:tgtEl>
-                    <p:sldTgt/>
-                  </p:tgtEl>
-                </p:cond>
-              </p:nextCondLst>
-            </p:seq>
-          </p:childTnLst>
-        </p:cTn>
-      </p:par>
-    </p:tnLst>
-    <p:bldLst>
-      <p:bldP spid="82" grpId="0" animBg="1" advAuto="0"/>
-    </p:bldLst>
-  </p:timing>
-</p:sld>
-</file>
-
-<file path=ppt/slides/slide4.xml><?xml version="1.0" encoding="utf-8"?>
-<p:sld xmlns:a="http://schemas.openxmlformats.org/drawingml/2006/main" xmlns:r="http://schemas.openxmlformats.org/officeDocument/2006/relationships" xmlns:p="http://schemas.openxmlformats.org/presentationml/2006/main">
-  <p:cSld>
-    <p:spTree>
-      <p:nvGrpSpPr>
-        <p:cNvPr id="1" name=""/>
-        <p:cNvGrpSpPr/>
-        <p:nvPr/>
-      </p:nvGrpSpPr>
-      <p:grpSpPr>
-        <a:xfrm>
-          <a:off x="0" y="0"/>
-          <a:ext cx="0" cy="0"/>
-          <a:chOff x="0" y="0"/>
-          <a:chExt cx="0" cy="0"/>
-        </a:xfrm>
-      </p:grpSpPr>
-      <p:sp>
-        <p:nvSpPr>
           <p:cNvPr id="74" name="Shape 74"/>
           <p:cNvSpPr/>
           <p:nvPr/>
@@ -12964,7 +12090,7 @@
           </a:ln>
           <a:extLst>
             <a:ext uri="{C572A759-6A51-4108-AA02-DFA0A04FC94B}">
-              <ma14:wrappingTextBoxFlag xmlns="" xmlns:ma14="http://schemas.microsoft.com/office/mac/drawingml/2011/main" val="1"/>
+              <ma14:wrappingTextBoxFlag xmlns:ma14="http://schemas.microsoft.com/office/mac/drawingml/2011/main" xmlns="" val="1"/>
             </a:ext>
           </a:extLst>
         </p:spPr>
@@ -13014,7 +12140,7 @@
           </a:ln>
           <a:extLst>
             <a:ext uri="{C572A759-6A51-4108-AA02-DFA0A04FC94B}">
-              <ma14:wrappingTextBoxFlag xmlns="" xmlns:ma14="http://schemas.microsoft.com/office/mac/drawingml/2011/main" val="1"/>
+              <ma14:wrappingTextBoxFlag xmlns:ma14="http://schemas.microsoft.com/office/mac/drawingml/2011/main" xmlns="" val="1"/>
             </a:ext>
           </a:extLst>
         </p:spPr>
@@ -13112,7 +12238,7 @@
           </a:ln>
           <a:extLst>
             <a:ext uri="{C572A759-6A51-4108-AA02-DFA0A04FC94B}">
-              <ma14:wrappingTextBoxFlag xmlns="" xmlns:ma14="http://schemas.microsoft.com/office/mac/drawingml/2011/main" val="1"/>
+              <ma14:wrappingTextBoxFlag xmlns:ma14="http://schemas.microsoft.com/office/mac/drawingml/2011/main" xmlns="" val="1"/>
             </a:ext>
           </a:extLst>
         </p:spPr>
@@ -13168,7 +12294,7 @@
           </a:ln>
           <a:extLst>
             <a:ext uri="{C572A759-6A51-4108-AA02-DFA0A04FC94B}">
-              <ma14:wrappingTextBoxFlag xmlns="" xmlns:ma14="http://schemas.microsoft.com/office/mac/drawingml/2011/main" val="1"/>
+              <ma14:wrappingTextBoxFlag xmlns:ma14="http://schemas.microsoft.com/office/mac/drawingml/2011/main" xmlns="" val="1"/>
             </a:ext>
           </a:extLst>
         </p:spPr>
@@ -13232,7 +12358,7 @@
           </a:ln>
           <a:extLst>
             <a:ext uri="{C572A759-6A51-4108-AA02-DFA0A04FC94B}">
-              <ma14:wrappingTextBoxFlag xmlns="" xmlns:ma14="http://schemas.microsoft.com/office/mac/drawingml/2011/main" val="1"/>
+              <ma14:wrappingTextBoxFlag xmlns:ma14="http://schemas.microsoft.com/office/mac/drawingml/2011/main" xmlns="" val="1"/>
             </a:ext>
           </a:extLst>
         </p:spPr>
@@ -13296,7 +12422,7 @@
           </a:ln>
           <a:extLst>
             <a:ext uri="{C572A759-6A51-4108-AA02-DFA0A04FC94B}">
-              <ma14:wrappingTextBoxFlag xmlns="" xmlns:ma14="http://schemas.microsoft.com/office/mac/drawingml/2011/main" val="1"/>
+              <ma14:wrappingTextBoxFlag xmlns:ma14="http://schemas.microsoft.com/office/mac/drawingml/2011/main" xmlns="" val="1"/>
             </a:ext>
           </a:extLst>
         </p:spPr>
@@ -13398,7 +12524,7 @@
           </a:ln>
           <a:extLst>
             <a:ext uri="{C572A759-6A51-4108-AA02-DFA0A04FC94B}">
-              <ma14:wrappingTextBoxFlag xmlns="" xmlns:ma14="http://schemas.microsoft.com/office/mac/drawingml/2011/main" val="1"/>
+              <ma14:wrappingTextBoxFlag xmlns:ma14="http://schemas.microsoft.com/office/mac/drawingml/2011/main" xmlns="" val="1"/>
             </a:ext>
           </a:extLst>
         </p:spPr>
@@ -13933,7 +13059,7 @@
           </a:ln>
           <a:extLst>
             <a:ext uri="{C572A759-6A51-4108-AA02-DFA0A04FC94B}">
-              <ma14:wrappingTextBoxFlag xmlns="" xmlns:ma14="http://schemas.microsoft.com/office/mac/drawingml/2011/main" val="1"/>
+              <ma14:wrappingTextBoxFlag xmlns:ma14="http://schemas.microsoft.com/office/mac/drawingml/2011/main" xmlns="" val="1"/>
             </a:ext>
           </a:extLst>
         </p:spPr>
@@ -13980,7 +13106,7 @@
           </a:ln>
           <a:extLst>
             <a:ext uri="{C572A759-6A51-4108-AA02-DFA0A04FC94B}">
-              <ma14:wrappingTextBoxFlag xmlns="" xmlns:ma14="http://schemas.microsoft.com/office/mac/drawingml/2011/main" val="1"/>
+              <ma14:wrappingTextBoxFlag xmlns:ma14="http://schemas.microsoft.com/office/mac/drawingml/2011/main" xmlns="" val="1"/>
             </a:ext>
           </a:extLst>
         </p:spPr>
@@ -14984,7 +14110,7 @@
 </p:sld>
 </file>
 
-<file path=ppt/slides/slide5.xml><?xml version="1.0" encoding="utf-8"?>
+<file path=ppt/slides/slide4.xml><?xml version="1.0" encoding="utf-8"?>
 <p:sld xmlns:a="http://schemas.openxmlformats.org/drawingml/2006/main" xmlns:r="http://schemas.openxmlformats.org/officeDocument/2006/relationships" xmlns:p="http://schemas.openxmlformats.org/presentationml/2006/main">
   <p:cSld>
     <p:spTree>
@@ -15695,7 +14821,7 @@
 </p:sld>
 </file>
 
-<file path=ppt/slides/slide6.xml><?xml version="1.0" encoding="utf-8"?>
+<file path=ppt/slides/slide5.xml><?xml version="1.0" encoding="utf-8"?>
 <p:sld xmlns:a="http://schemas.openxmlformats.org/drawingml/2006/main" xmlns:r="http://schemas.openxmlformats.org/officeDocument/2006/relationships" xmlns:p="http://schemas.openxmlformats.org/presentationml/2006/main">
   <p:cSld>
     <p:spTree>
@@ -16252,7 +15378,7 @@
 </p:sld>
 </file>
 
-<file path=ppt/slides/slide7.xml><?xml version="1.0" encoding="utf-8"?>
+<file path=ppt/slides/slide6.xml><?xml version="1.0" encoding="utf-8"?>
 <p:sld xmlns:a="http://schemas.openxmlformats.org/drawingml/2006/main" xmlns:r="http://schemas.openxmlformats.org/officeDocument/2006/relationships" xmlns:p="http://schemas.openxmlformats.org/presentationml/2006/main">
   <p:cSld>
     <p:bg>
@@ -16721,7 +15847,7 @@
 </p:sld>
 </file>
 
-<file path=ppt/slides/slide8.xml><?xml version="1.0" encoding="utf-8"?>
+<file path=ppt/slides/slide7.xml><?xml version="1.0" encoding="utf-8"?>
 <p:sld xmlns:a="http://schemas.openxmlformats.org/drawingml/2006/main" xmlns:r="http://schemas.openxmlformats.org/officeDocument/2006/relationships" xmlns:p="http://schemas.openxmlformats.org/presentationml/2006/main">
   <p:cSld>
     <p:spTree>
@@ -17965,7 +17091,7 @@
 </p:sld>
 </file>
 
-<file path=ppt/slides/slide9.xml><?xml version="1.0" encoding="utf-8"?>
+<file path=ppt/slides/slide8.xml><?xml version="1.0" encoding="utf-8"?>
 <p:sld xmlns:a="http://schemas.openxmlformats.org/drawingml/2006/main" xmlns:r="http://schemas.openxmlformats.org/officeDocument/2006/relationships" xmlns:p="http://schemas.openxmlformats.org/presentationml/2006/main">
   <p:cSld>
     <p:spTree>
@@ -18560,6 +17686,502 @@
       <p:bldP spid="108" grpId="0" build="p" advAuto="0"/>
     </p:bldLst>
   </p:timing>
+</p:sld>
+</file>
+
+<file path=ppt/slides/slide9.xml><?xml version="1.0" encoding="utf-8"?>
+<p:sld xmlns:a="http://schemas.openxmlformats.org/drawingml/2006/main" xmlns:r="http://schemas.openxmlformats.org/officeDocument/2006/relationships" xmlns:p="http://schemas.openxmlformats.org/presentationml/2006/main">
+  <p:cSld>
+    <p:bg>
+      <p:bgPr>
+        <a:solidFill>
+          <a:schemeClr val="bg1"/>
+        </a:solidFill>
+        <a:effectLst/>
+      </p:bgPr>
+    </p:bg>
+    <p:spTree>
+      <p:nvGrpSpPr>
+        <p:cNvPr id="1" name=""/>
+        <p:cNvGrpSpPr/>
+        <p:nvPr/>
+      </p:nvGrpSpPr>
+      <p:grpSpPr>
+        <a:xfrm>
+          <a:off x="0" y="0"/>
+          <a:ext cx="0" cy="0"/>
+          <a:chOff x="0" y="0"/>
+          <a:chExt cx="0" cy="0"/>
+        </a:xfrm>
+      </p:grpSpPr>
+      <p:sp>
+        <p:nvSpPr>
+          <p:cNvPr id="7" name="Textfeld 6"/>
+          <p:cNvSpPr txBox="1"/>
+          <p:nvPr/>
+        </p:nvSpPr>
+        <p:spPr>
+          <a:xfrm>
+            <a:off x="757169" y="1261240"/>
+            <a:ext cx="7453259" cy="646331"/>
+          </a:xfrm>
+          <a:prstGeom prst="rect">
+            <a:avLst/>
+          </a:prstGeom>
+          <a:noFill/>
+        </p:spPr>
+        <p:txBody>
+          <a:bodyPr wrap="none" rtlCol="0">
+            <a:spAutoFit/>
+          </a:bodyPr>
+          <a:lstStyle/>
+          <a:p>
+            <a:r>
+              <a:rPr lang="de-AT" b="1" i="1" dirty="0"/>
+              <a:t>Einseitige Verzweigung</a:t>
+            </a:r>
+          </a:p>
+          <a:p>
+            <a:r>
+              <a:rPr lang="de-AT" dirty="0"/>
+              <a:t>Trifft eine </a:t>
+            </a:r>
+            <a:r>
+              <a:rPr lang="de-AT" dirty="0">
+                <a:solidFill>
+                  <a:srgbClr val="FF0000"/>
+                </a:solidFill>
+              </a:rPr>
+              <a:t>&lt;</a:t>
+            </a:r>
+            <a:r>
+              <a:rPr lang="de-AT" i="1" dirty="0">
+                <a:solidFill>
+                  <a:srgbClr val="FF0000"/>
+                </a:solidFill>
+              </a:rPr>
+              <a:t>Bedingung&gt;</a:t>
+            </a:r>
+            <a:r>
+              <a:rPr lang="de-AT" dirty="0"/>
+              <a:t> zu, so werden bestimmte </a:t>
+            </a:r>
+            <a:r>
+              <a:rPr lang="de-AT" dirty="0">
+                <a:solidFill>
+                  <a:srgbClr val="CC3300"/>
+                </a:solidFill>
+              </a:rPr>
+              <a:t>&lt;</a:t>
+            </a:r>
+            <a:r>
+              <a:rPr lang="de-AT" i="1" dirty="0">
+                <a:solidFill>
+                  <a:srgbClr val="CC3300"/>
+                </a:solidFill>
+              </a:rPr>
+              <a:t>Anweisungen&gt;</a:t>
+            </a:r>
+            <a:r>
+              <a:rPr lang="de-AT" dirty="0">
+                <a:solidFill>
+                  <a:srgbClr val="CC3300"/>
+                </a:solidFill>
+              </a:rPr>
+              <a:t> </a:t>
+            </a:r>
+            <a:r>
+              <a:rPr lang="de-AT" dirty="0"/>
+              <a:t>ausgeführt.</a:t>
+            </a:r>
+          </a:p>
+        </p:txBody>
+      </p:sp>
+      <p:sp>
+        <p:nvSpPr>
+          <p:cNvPr id="12" name="Flussdiagramm: Verzweigung 11"/>
+          <p:cNvSpPr/>
+          <p:nvPr/>
+        </p:nvSpPr>
+        <p:spPr>
+          <a:xfrm>
+            <a:off x="2735796" y="2701400"/>
+            <a:ext cx="3348371" cy="756084"/>
+          </a:xfrm>
+          <a:prstGeom prst="flowChartDecision">
+            <a:avLst/>
+          </a:prstGeom>
+          <a:solidFill>
+            <a:schemeClr val="accent5">
+              <a:lumMod val="20000"/>
+              <a:lumOff val="80000"/>
+            </a:schemeClr>
+          </a:solidFill>
+        </p:spPr>
+        <p:style>
+          <a:lnRef idx="2">
+            <a:schemeClr val="accent1">
+              <a:shade val="50000"/>
+            </a:schemeClr>
+          </a:lnRef>
+          <a:fillRef idx="1">
+            <a:schemeClr val="accent1"/>
+          </a:fillRef>
+          <a:effectRef idx="0">
+            <a:schemeClr val="accent1"/>
+          </a:effectRef>
+          <a:fontRef idx="minor">
+            <a:schemeClr val="lt1"/>
+          </a:fontRef>
+        </p:style>
+        <p:txBody>
+          <a:bodyPr rtlCol="0" anchor="ctr"/>
+          <a:lstStyle/>
+          <a:p>
+            <a:pPr algn="ctr"/>
+            <a:r>
+              <a:rPr lang="de-AT" i="1" dirty="0">
+                <a:solidFill>
+                  <a:srgbClr val="FF0000"/>
+                </a:solidFill>
+              </a:rPr>
+              <a:t>&lt;Bedingung&gt;</a:t>
+            </a:r>
+          </a:p>
+        </p:txBody>
+      </p:sp>
+      <p:cxnSp>
+        <p:nvCxnSpPr>
+          <p:cNvPr id="14" name="Gerade Verbindung mit Pfeil 13"/>
+          <p:cNvCxnSpPr>
+            <a:endCxn id="12" idx="0"/>
+          </p:cNvCxnSpPr>
+          <p:nvPr/>
+        </p:nvCxnSpPr>
+        <p:spPr>
+          <a:xfrm flipH="1">
+            <a:off x="4409982" y="2197344"/>
+            <a:ext cx="1592" cy="504056"/>
+          </a:xfrm>
+          <a:prstGeom prst="straightConnector1">
+            <a:avLst/>
+          </a:prstGeom>
+          <a:ln w="22225">
+            <a:solidFill>
+              <a:schemeClr val="tx2"/>
+            </a:solidFill>
+            <a:tailEnd type="arrow"/>
+          </a:ln>
+        </p:spPr>
+        <p:style>
+          <a:lnRef idx="1">
+            <a:schemeClr val="accent1"/>
+          </a:lnRef>
+          <a:fillRef idx="0">
+            <a:schemeClr val="accent1"/>
+          </a:fillRef>
+          <a:effectRef idx="0">
+            <a:schemeClr val="accent1"/>
+          </a:effectRef>
+          <a:fontRef idx="minor">
+            <a:schemeClr val="tx1"/>
+          </a:fontRef>
+        </p:style>
+      </p:cxnSp>
+      <p:cxnSp>
+        <p:nvCxnSpPr>
+          <p:cNvPr id="17" name="Gewinkelte Verbindung 16"/>
+          <p:cNvCxnSpPr>
+            <a:stCxn id="12" idx="3"/>
+          </p:cNvCxnSpPr>
+          <p:nvPr/>
+        </p:nvCxnSpPr>
+        <p:spPr>
+          <a:xfrm>
+            <a:off x="6084167" y="3079442"/>
+            <a:ext cx="289626" cy="1494165"/>
+          </a:xfrm>
+          <a:prstGeom prst="bentConnector2">
+            <a:avLst/>
+          </a:prstGeom>
+          <a:ln w="22225">
+            <a:solidFill>
+              <a:schemeClr val="tx2"/>
+            </a:solidFill>
+            <a:tailEnd type="none"/>
+          </a:ln>
+        </p:spPr>
+        <p:style>
+          <a:lnRef idx="1">
+            <a:schemeClr val="accent1"/>
+          </a:lnRef>
+          <a:fillRef idx="0">
+            <a:schemeClr val="accent1"/>
+          </a:fillRef>
+          <a:effectRef idx="0">
+            <a:schemeClr val="accent1"/>
+          </a:effectRef>
+          <a:fontRef idx="minor">
+            <a:schemeClr val="tx1"/>
+          </a:fontRef>
+        </p:style>
+      </p:cxnSp>
+      <p:cxnSp>
+        <p:nvCxnSpPr>
+          <p:cNvPr id="19" name="Gewinkelte Verbindung 18"/>
+          <p:cNvCxnSpPr>
+            <a:stCxn id="12" idx="1"/>
+            <a:endCxn id="20" idx="0"/>
+          </p:cNvCxnSpPr>
+          <p:nvPr/>
+        </p:nvCxnSpPr>
+        <p:spPr>
+          <a:xfrm rot="10800000" flipV="1">
+            <a:off x="2447764" y="3079442"/>
+            <a:ext cx="288032" cy="630070"/>
+          </a:xfrm>
+          <a:prstGeom prst="bentConnector2">
+            <a:avLst/>
+          </a:prstGeom>
+          <a:ln w="22225">
+            <a:solidFill>
+              <a:schemeClr val="tx2"/>
+            </a:solidFill>
+            <a:tailEnd type="arrow"/>
+          </a:ln>
+        </p:spPr>
+        <p:style>
+          <a:lnRef idx="1">
+            <a:schemeClr val="accent1"/>
+          </a:lnRef>
+          <a:fillRef idx="0">
+            <a:schemeClr val="accent1"/>
+          </a:fillRef>
+          <a:effectRef idx="0">
+            <a:schemeClr val="accent1"/>
+          </a:effectRef>
+          <a:fontRef idx="minor">
+            <a:schemeClr val="tx1"/>
+          </a:fontRef>
+        </p:style>
+      </p:cxnSp>
+      <p:sp>
+        <p:nvSpPr>
+          <p:cNvPr id="20" name="Flussdiagramm: Prozess 19"/>
+          <p:cNvSpPr/>
+          <p:nvPr/>
+        </p:nvSpPr>
+        <p:spPr>
+          <a:xfrm>
+            <a:off x="1403018" y="3709512"/>
+            <a:ext cx="2089491" cy="504056"/>
+          </a:xfrm>
+          <a:prstGeom prst="flowChartProcess">
+            <a:avLst/>
+          </a:prstGeom>
+          <a:solidFill>
+            <a:schemeClr val="accent5">
+              <a:lumMod val="20000"/>
+              <a:lumOff val="80000"/>
+            </a:schemeClr>
+          </a:solidFill>
+        </p:spPr>
+        <p:style>
+          <a:lnRef idx="2">
+            <a:schemeClr val="accent1">
+              <a:shade val="50000"/>
+            </a:schemeClr>
+          </a:lnRef>
+          <a:fillRef idx="1">
+            <a:schemeClr val="accent1"/>
+          </a:fillRef>
+          <a:effectRef idx="0">
+            <a:schemeClr val="accent1"/>
+          </a:effectRef>
+          <a:fontRef idx="minor">
+            <a:schemeClr val="lt1"/>
+          </a:fontRef>
+        </p:style>
+        <p:txBody>
+          <a:bodyPr rtlCol="0" anchor="ctr"/>
+          <a:lstStyle/>
+          <a:p>
+            <a:pPr algn="ctr"/>
+            <a:r>
+              <a:rPr lang="de-AT" i="1" dirty="0">
+                <a:solidFill>
+                  <a:srgbClr val="CC3300"/>
+                </a:solidFill>
+              </a:rPr>
+              <a:t>&lt;Anweisungen&gt;</a:t>
+            </a:r>
+          </a:p>
+        </p:txBody>
+      </p:sp>
+      <p:cxnSp>
+        <p:nvCxnSpPr>
+          <p:cNvPr id="1025" name="Gewinkelte Verbindung 1024"/>
+          <p:cNvCxnSpPr>
+            <a:stCxn id="20" idx="2"/>
+          </p:cNvCxnSpPr>
+          <p:nvPr/>
+        </p:nvCxnSpPr>
+        <p:spPr>
+          <a:xfrm rot="16200000" flipH="1">
+            <a:off x="4230759" y="2430573"/>
+            <a:ext cx="360039" cy="3926028"/>
+          </a:xfrm>
+          <a:prstGeom prst="bentConnector2">
+            <a:avLst/>
+          </a:prstGeom>
+          <a:ln w="22225">
+            <a:solidFill>
+              <a:schemeClr val="tx2"/>
+            </a:solidFill>
+          </a:ln>
+        </p:spPr>
+        <p:style>
+          <a:lnRef idx="1">
+            <a:schemeClr val="accent1"/>
+          </a:lnRef>
+          <a:fillRef idx="0">
+            <a:schemeClr val="accent1"/>
+          </a:fillRef>
+          <a:effectRef idx="0">
+            <a:schemeClr val="accent1"/>
+          </a:effectRef>
+          <a:fontRef idx="minor">
+            <a:schemeClr val="tx1"/>
+          </a:fontRef>
+        </p:style>
+      </p:cxnSp>
+      <p:cxnSp>
+        <p:nvCxnSpPr>
+          <p:cNvPr id="1029" name="Gerade Verbindung mit Pfeil 1028"/>
+          <p:cNvCxnSpPr/>
+          <p:nvPr/>
+        </p:nvCxnSpPr>
+        <p:spPr>
+          <a:xfrm>
+            <a:off x="4428613" y="4573608"/>
+            <a:ext cx="0" cy="648072"/>
+          </a:xfrm>
+          <a:prstGeom prst="straightConnector1">
+            <a:avLst/>
+          </a:prstGeom>
+          <a:ln w="22225">
+            <a:solidFill>
+              <a:schemeClr val="tx2"/>
+            </a:solidFill>
+            <a:tailEnd type="arrow"/>
+          </a:ln>
+        </p:spPr>
+        <p:style>
+          <a:lnRef idx="1">
+            <a:schemeClr val="accent1"/>
+          </a:lnRef>
+          <a:fillRef idx="0">
+            <a:schemeClr val="accent1"/>
+          </a:fillRef>
+          <a:effectRef idx="0">
+            <a:schemeClr val="accent1"/>
+          </a:effectRef>
+          <a:fontRef idx="minor">
+            <a:schemeClr val="tx1"/>
+          </a:fontRef>
+        </p:style>
+      </p:cxnSp>
+      <p:sp>
+        <p:nvSpPr>
+          <p:cNvPr id="3" name="Textfeld 2"/>
+          <p:cNvSpPr txBox="1"/>
+          <p:nvPr/>
+        </p:nvSpPr>
+        <p:spPr>
+          <a:xfrm>
+            <a:off x="2341345" y="2764116"/>
+            <a:ext cx="599972" cy="369332"/>
+          </a:xfrm>
+          <a:prstGeom prst="rect">
+            <a:avLst/>
+          </a:prstGeom>
+          <a:noFill/>
+        </p:spPr>
+        <p:txBody>
+          <a:bodyPr wrap="none" rtlCol="0">
+            <a:spAutoFit/>
+          </a:bodyPr>
+          <a:lstStyle/>
+          <a:p>
+            <a:r>
+              <a:rPr lang="de-AT" dirty="0"/>
+              <a:t>True</a:t>
+            </a:r>
+          </a:p>
+        </p:txBody>
+      </p:sp>
+      <p:sp>
+        <p:nvSpPr>
+          <p:cNvPr id="18" name="Textfeld 17"/>
+          <p:cNvSpPr txBox="1"/>
+          <p:nvPr/>
+        </p:nvSpPr>
+        <p:spPr>
+          <a:xfrm>
+            <a:off x="5773821" y="2764116"/>
+            <a:ext cx="652936" cy="369332"/>
+          </a:xfrm>
+          <a:prstGeom prst="rect">
+            <a:avLst/>
+          </a:prstGeom>
+          <a:noFill/>
+        </p:spPr>
+        <p:txBody>
+          <a:bodyPr wrap="none" rtlCol="0">
+            <a:spAutoFit/>
+          </a:bodyPr>
+          <a:lstStyle/>
+          <a:p>
+            <a:r>
+              <a:rPr lang="de-AT" dirty="0" err="1"/>
+              <a:t>False</a:t>
+            </a:r>
+            <a:endParaRPr lang="de-AT" dirty="0"/>
+          </a:p>
+        </p:txBody>
+      </p:sp>
+      <p:sp>
+        <p:nvSpPr>
+          <p:cNvPr id="10" name="Titel 9"/>
+          <p:cNvSpPr>
+            <a:spLocks noGrp="1"/>
+          </p:cNvSpPr>
+          <p:nvPr>
+            <p:ph type="title"/>
+          </p:nvPr>
+        </p:nvSpPr>
+        <p:spPr/>
+        <p:txBody>
+          <a:bodyPr/>
+          <a:lstStyle/>
+          <a:p>
+            <a:r>
+              <a:rPr lang="de-AT" dirty="0"/>
+              <a:t>Einseitige Verzweigung</a:t>
+            </a:r>
+          </a:p>
+        </p:txBody>
+      </p:sp>
+    </p:spTree>
+    <p:extLst>
+      <p:ext uri="{BB962C8B-B14F-4D97-AF65-F5344CB8AC3E}">
+        <p14:creationId xmlns:p14="http://schemas.microsoft.com/office/powerpoint/2010/main" val="2666897657"/>
+      </p:ext>
+    </p:extLst>
+  </p:cSld>
+  <p:clrMapOvr>
+    <a:masterClrMapping/>
+  </p:clrMapOvr>
 </p:sld>
 </file>
 

--- a/03_Selektion/03_Selektion.pptx
+++ b/03_Selektion/03_Selektion.pptx
@@ -5,7 +5,7 @@
     <p:sldMasterId id="2147483671" r:id="rId1"/>
   </p:sldMasterIdLst>
   <p:notesMasterIdLst>
-    <p:notesMasterId r:id="rId24"/>
+    <p:notesMasterId r:id="rId25"/>
   </p:notesMasterIdLst>
   <p:sldIdLst>
     <p:sldId id="279" r:id="rId2"/>
@@ -15,21 +15,22 @@
     <p:sldId id="283" r:id="rId6"/>
     <p:sldId id="264" r:id="rId7"/>
     <p:sldId id="284" r:id="rId8"/>
-    <p:sldId id="286" r:id="rId9"/>
-    <p:sldId id="263" r:id="rId10"/>
-    <p:sldId id="267" r:id="rId11"/>
-    <p:sldId id="268" r:id="rId12"/>
-    <p:sldId id="269" r:id="rId13"/>
-    <p:sldId id="270" r:id="rId14"/>
-    <p:sldId id="288" r:id="rId15"/>
-    <p:sldId id="271" r:id="rId16"/>
-    <p:sldId id="274" r:id="rId17"/>
-    <p:sldId id="272" r:id="rId18"/>
-    <p:sldId id="273" r:id="rId19"/>
-    <p:sldId id="289" r:id="rId20"/>
-    <p:sldId id="291" r:id="rId21"/>
-    <p:sldId id="275" r:id="rId22"/>
-    <p:sldId id="277" r:id="rId23"/>
+    <p:sldId id="293" r:id="rId9"/>
+    <p:sldId id="286" r:id="rId10"/>
+    <p:sldId id="263" r:id="rId11"/>
+    <p:sldId id="267" r:id="rId12"/>
+    <p:sldId id="268" r:id="rId13"/>
+    <p:sldId id="269" r:id="rId14"/>
+    <p:sldId id="270" r:id="rId15"/>
+    <p:sldId id="288" r:id="rId16"/>
+    <p:sldId id="271" r:id="rId17"/>
+    <p:sldId id="274" r:id="rId18"/>
+    <p:sldId id="272" r:id="rId19"/>
+    <p:sldId id="273" r:id="rId20"/>
+    <p:sldId id="289" r:id="rId21"/>
+    <p:sldId id="291" r:id="rId22"/>
+    <p:sldId id="275" r:id="rId23"/>
+    <p:sldId id="277" r:id="rId24"/>
   </p:sldIdLst>
   <p:sldSz cx="9144000" cy="6858000" type="screen4x3"/>
   <p:notesSz cx="6858000" cy="9144000"/>
@@ -229,7 +230,7 @@
           <a:p>
             <a:fld id="{BF336932-01FD-45AF-B110-84880AA37D65}" type="datetimeFigureOut">
               <a:rPr lang="de-AT" smtClean="0"/>
-              <a:t>01.10.2021</a:t>
+              <a:t>07.10.2021</a:t>
             </a:fld>
             <a:endParaRPr lang="de-AT"/>
           </a:p>
@@ -2159,6 +2160,502 @@
         </p:nvSpPr>
         <p:spPr>
           <a:xfrm>
+            <a:off x="757169" y="1261240"/>
+            <a:ext cx="7453259" cy="646331"/>
+          </a:xfrm>
+          <a:prstGeom prst="rect">
+            <a:avLst/>
+          </a:prstGeom>
+          <a:noFill/>
+        </p:spPr>
+        <p:txBody>
+          <a:bodyPr wrap="none" rtlCol="0">
+            <a:spAutoFit/>
+          </a:bodyPr>
+          <a:lstStyle/>
+          <a:p>
+            <a:r>
+              <a:rPr lang="de-AT" b="1" i="1" dirty="0"/>
+              <a:t>Einseitige Verzweigung</a:t>
+            </a:r>
+          </a:p>
+          <a:p>
+            <a:r>
+              <a:rPr lang="de-AT" dirty="0"/>
+              <a:t>Trifft eine </a:t>
+            </a:r>
+            <a:r>
+              <a:rPr lang="de-AT" dirty="0">
+                <a:solidFill>
+                  <a:srgbClr val="FF0000"/>
+                </a:solidFill>
+              </a:rPr>
+              <a:t>&lt;</a:t>
+            </a:r>
+            <a:r>
+              <a:rPr lang="de-AT" i="1" dirty="0">
+                <a:solidFill>
+                  <a:srgbClr val="FF0000"/>
+                </a:solidFill>
+              </a:rPr>
+              <a:t>Bedingung&gt;</a:t>
+            </a:r>
+            <a:r>
+              <a:rPr lang="de-AT" dirty="0"/>
+              <a:t> zu, so werden bestimmte </a:t>
+            </a:r>
+            <a:r>
+              <a:rPr lang="de-AT" dirty="0">
+                <a:solidFill>
+                  <a:srgbClr val="CC3300"/>
+                </a:solidFill>
+              </a:rPr>
+              <a:t>&lt;</a:t>
+            </a:r>
+            <a:r>
+              <a:rPr lang="de-AT" i="1" dirty="0">
+                <a:solidFill>
+                  <a:srgbClr val="CC3300"/>
+                </a:solidFill>
+              </a:rPr>
+              <a:t>Anweisungen&gt;</a:t>
+            </a:r>
+            <a:r>
+              <a:rPr lang="de-AT" dirty="0">
+                <a:solidFill>
+                  <a:srgbClr val="CC3300"/>
+                </a:solidFill>
+              </a:rPr>
+              <a:t> </a:t>
+            </a:r>
+            <a:r>
+              <a:rPr lang="de-AT" dirty="0"/>
+              <a:t>ausgeführt.</a:t>
+            </a:r>
+          </a:p>
+        </p:txBody>
+      </p:sp>
+      <p:sp>
+        <p:nvSpPr>
+          <p:cNvPr id="12" name="Flussdiagramm: Verzweigung 11"/>
+          <p:cNvSpPr/>
+          <p:nvPr/>
+        </p:nvSpPr>
+        <p:spPr>
+          <a:xfrm>
+            <a:off x="2735796" y="2701400"/>
+            <a:ext cx="3348371" cy="756084"/>
+          </a:xfrm>
+          <a:prstGeom prst="flowChartDecision">
+            <a:avLst/>
+          </a:prstGeom>
+          <a:solidFill>
+            <a:schemeClr val="accent5">
+              <a:lumMod val="20000"/>
+              <a:lumOff val="80000"/>
+            </a:schemeClr>
+          </a:solidFill>
+        </p:spPr>
+        <p:style>
+          <a:lnRef idx="2">
+            <a:schemeClr val="accent1">
+              <a:shade val="50000"/>
+            </a:schemeClr>
+          </a:lnRef>
+          <a:fillRef idx="1">
+            <a:schemeClr val="accent1"/>
+          </a:fillRef>
+          <a:effectRef idx="0">
+            <a:schemeClr val="accent1"/>
+          </a:effectRef>
+          <a:fontRef idx="minor">
+            <a:schemeClr val="lt1"/>
+          </a:fontRef>
+        </p:style>
+        <p:txBody>
+          <a:bodyPr rtlCol="0" anchor="ctr"/>
+          <a:lstStyle/>
+          <a:p>
+            <a:pPr algn="ctr"/>
+            <a:r>
+              <a:rPr lang="de-AT" i="1" dirty="0">
+                <a:solidFill>
+                  <a:srgbClr val="FF0000"/>
+                </a:solidFill>
+              </a:rPr>
+              <a:t>&lt;Bedingung&gt;</a:t>
+            </a:r>
+          </a:p>
+        </p:txBody>
+      </p:sp>
+      <p:cxnSp>
+        <p:nvCxnSpPr>
+          <p:cNvPr id="14" name="Gerade Verbindung mit Pfeil 13"/>
+          <p:cNvCxnSpPr>
+            <a:endCxn id="12" idx="0"/>
+          </p:cNvCxnSpPr>
+          <p:nvPr/>
+        </p:nvCxnSpPr>
+        <p:spPr>
+          <a:xfrm flipH="1">
+            <a:off x="4409982" y="2197344"/>
+            <a:ext cx="1592" cy="504056"/>
+          </a:xfrm>
+          <a:prstGeom prst="straightConnector1">
+            <a:avLst/>
+          </a:prstGeom>
+          <a:ln w="22225">
+            <a:solidFill>
+              <a:schemeClr val="tx2"/>
+            </a:solidFill>
+            <a:tailEnd type="arrow"/>
+          </a:ln>
+        </p:spPr>
+        <p:style>
+          <a:lnRef idx="1">
+            <a:schemeClr val="accent1"/>
+          </a:lnRef>
+          <a:fillRef idx="0">
+            <a:schemeClr val="accent1"/>
+          </a:fillRef>
+          <a:effectRef idx="0">
+            <a:schemeClr val="accent1"/>
+          </a:effectRef>
+          <a:fontRef idx="minor">
+            <a:schemeClr val="tx1"/>
+          </a:fontRef>
+        </p:style>
+      </p:cxnSp>
+      <p:cxnSp>
+        <p:nvCxnSpPr>
+          <p:cNvPr id="17" name="Gewinkelte Verbindung 16"/>
+          <p:cNvCxnSpPr>
+            <a:stCxn id="12" idx="3"/>
+          </p:cNvCxnSpPr>
+          <p:nvPr/>
+        </p:nvCxnSpPr>
+        <p:spPr>
+          <a:xfrm>
+            <a:off x="6084167" y="3079442"/>
+            <a:ext cx="289626" cy="1494165"/>
+          </a:xfrm>
+          <a:prstGeom prst="bentConnector2">
+            <a:avLst/>
+          </a:prstGeom>
+          <a:ln w="22225">
+            <a:solidFill>
+              <a:schemeClr val="tx2"/>
+            </a:solidFill>
+            <a:tailEnd type="none"/>
+          </a:ln>
+        </p:spPr>
+        <p:style>
+          <a:lnRef idx="1">
+            <a:schemeClr val="accent1"/>
+          </a:lnRef>
+          <a:fillRef idx="0">
+            <a:schemeClr val="accent1"/>
+          </a:fillRef>
+          <a:effectRef idx="0">
+            <a:schemeClr val="accent1"/>
+          </a:effectRef>
+          <a:fontRef idx="minor">
+            <a:schemeClr val="tx1"/>
+          </a:fontRef>
+        </p:style>
+      </p:cxnSp>
+      <p:cxnSp>
+        <p:nvCxnSpPr>
+          <p:cNvPr id="19" name="Gewinkelte Verbindung 18"/>
+          <p:cNvCxnSpPr>
+            <a:stCxn id="12" idx="1"/>
+            <a:endCxn id="20" idx="0"/>
+          </p:cNvCxnSpPr>
+          <p:nvPr/>
+        </p:nvCxnSpPr>
+        <p:spPr>
+          <a:xfrm rot="10800000" flipV="1">
+            <a:off x="2447764" y="3079442"/>
+            <a:ext cx="288032" cy="630070"/>
+          </a:xfrm>
+          <a:prstGeom prst="bentConnector2">
+            <a:avLst/>
+          </a:prstGeom>
+          <a:ln w="22225">
+            <a:solidFill>
+              <a:schemeClr val="tx2"/>
+            </a:solidFill>
+            <a:tailEnd type="arrow"/>
+          </a:ln>
+        </p:spPr>
+        <p:style>
+          <a:lnRef idx="1">
+            <a:schemeClr val="accent1"/>
+          </a:lnRef>
+          <a:fillRef idx="0">
+            <a:schemeClr val="accent1"/>
+          </a:fillRef>
+          <a:effectRef idx="0">
+            <a:schemeClr val="accent1"/>
+          </a:effectRef>
+          <a:fontRef idx="minor">
+            <a:schemeClr val="tx1"/>
+          </a:fontRef>
+        </p:style>
+      </p:cxnSp>
+      <p:sp>
+        <p:nvSpPr>
+          <p:cNvPr id="20" name="Flussdiagramm: Prozess 19"/>
+          <p:cNvSpPr/>
+          <p:nvPr/>
+        </p:nvSpPr>
+        <p:spPr>
+          <a:xfrm>
+            <a:off x="1403018" y="3709512"/>
+            <a:ext cx="2089491" cy="504056"/>
+          </a:xfrm>
+          <a:prstGeom prst="flowChartProcess">
+            <a:avLst/>
+          </a:prstGeom>
+          <a:solidFill>
+            <a:schemeClr val="accent5">
+              <a:lumMod val="20000"/>
+              <a:lumOff val="80000"/>
+            </a:schemeClr>
+          </a:solidFill>
+        </p:spPr>
+        <p:style>
+          <a:lnRef idx="2">
+            <a:schemeClr val="accent1">
+              <a:shade val="50000"/>
+            </a:schemeClr>
+          </a:lnRef>
+          <a:fillRef idx="1">
+            <a:schemeClr val="accent1"/>
+          </a:fillRef>
+          <a:effectRef idx="0">
+            <a:schemeClr val="accent1"/>
+          </a:effectRef>
+          <a:fontRef idx="minor">
+            <a:schemeClr val="lt1"/>
+          </a:fontRef>
+        </p:style>
+        <p:txBody>
+          <a:bodyPr rtlCol="0" anchor="ctr"/>
+          <a:lstStyle/>
+          <a:p>
+            <a:pPr algn="ctr"/>
+            <a:r>
+              <a:rPr lang="de-AT" i="1" dirty="0">
+                <a:solidFill>
+                  <a:srgbClr val="CC3300"/>
+                </a:solidFill>
+              </a:rPr>
+              <a:t>&lt;Anweisungen&gt;</a:t>
+            </a:r>
+          </a:p>
+        </p:txBody>
+      </p:sp>
+      <p:cxnSp>
+        <p:nvCxnSpPr>
+          <p:cNvPr id="1025" name="Gewinkelte Verbindung 1024"/>
+          <p:cNvCxnSpPr>
+            <a:stCxn id="20" idx="2"/>
+          </p:cNvCxnSpPr>
+          <p:nvPr/>
+        </p:nvCxnSpPr>
+        <p:spPr>
+          <a:xfrm rot="16200000" flipH="1">
+            <a:off x="4230759" y="2430573"/>
+            <a:ext cx="360039" cy="3926028"/>
+          </a:xfrm>
+          <a:prstGeom prst="bentConnector2">
+            <a:avLst/>
+          </a:prstGeom>
+          <a:ln w="22225">
+            <a:solidFill>
+              <a:schemeClr val="tx2"/>
+            </a:solidFill>
+          </a:ln>
+        </p:spPr>
+        <p:style>
+          <a:lnRef idx="1">
+            <a:schemeClr val="accent1"/>
+          </a:lnRef>
+          <a:fillRef idx="0">
+            <a:schemeClr val="accent1"/>
+          </a:fillRef>
+          <a:effectRef idx="0">
+            <a:schemeClr val="accent1"/>
+          </a:effectRef>
+          <a:fontRef idx="minor">
+            <a:schemeClr val="tx1"/>
+          </a:fontRef>
+        </p:style>
+      </p:cxnSp>
+      <p:cxnSp>
+        <p:nvCxnSpPr>
+          <p:cNvPr id="1029" name="Gerade Verbindung mit Pfeil 1028"/>
+          <p:cNvCxnSpPr/>
+          <p:nvPr/>
+        </p:nvCxnSpPr>
+        <p:spPr>
+          <a:xfrm>
+            <a:off x="4428613" y="4573608"/>
+            <a:ext cx="0" cy="648072"/>
+          </a:xfrm>
+          <a:prstGeom prst="straightConnector1">
+            <a:avLst/>
+          </a:prstGeom>
+          <a:ln w="22225">
+            <a:solidFill>
+              <a:schemeClr val="tx2"/>
+            </a:solidFill>
+            <a:tailEnd type="arrow"/>
+          </a:ln>
+        </p:spPr>
+        <p:style>
+          <a:lnRef idx="1">
+            <a:schemeClr val="accent1"/>
+          </a:lnRef>
+          <a:fillRef idx="0">
+            <a:schemeClr val="accent1"/>
+          </a:fillRef>
+          <a:effectRef idx="0">
+            <a:schemeClr val="accent1"/>
+          </a:effectRef>
+          <a:fontRef idx="minor">
+            <a:schemeClr val="tx1"/>
+          </a:fontRef>
+        </p:style>
+      </p:cxnSp>
+      <p:sp>
+        <p:nvSpPr>
+          <p:cNvPr id="3" name="Textfeld 2"/>
+          <p:cNvSpPr txBox="1"/>
+          <p:nvPr/>
+        </p:nvSpPr>
+        <p:spPr>
+          <a:xfrm>
+            <a:off x="2341345" y="2764116"/>
+            <a:ext cx="599972" cy="369332"/>
+          </a:xfrm>
+          <a:prstGeom prst="rect">
+            <a:avLst/>
+          </a:prstGeom>
+          <a:noFill/>
+        </p:spPr>
+        <p:txBody>
+          <a:bodyPr wrap="none" rtlCol="0">
+            <a:spAutoFit/>
+          </a:bodyPr>
+          <a:lstStyle/>
+          <a:p>
+            <a:r>
+              <a:rPr lang="de-AT" dirty="0"/>
+              <a:t>True</a:t>
+            </a:r>
+          </a:p>
+        </p:txBody>
+      </p:sp>
+      <p:sp>
+        <p:nvSpPr>
+          <p:cNvPr id="18" name="Textfeld 17"/>
+          <p:cNvSpPr txBox="1"/>
+          <p:nvPr/>
+        </p:nvSpPr>
+        <p:spPr>
+          <a:xfrm>
+            <a:off x="5773821" y="2764116"/>
+            <a:ext cx="652936" cy="369332"/>
+          </a:xfrm>
+          <a:prstGeom prst="rect">
+            <a:avLst/>
+          </a:prstGeom>
+          <a:noFill/>
+        </p:spPr>
+        <p:txBody>
+          <a:bodyPr wrap="none" rtlCol="0">
+            <a:spAutoFit/>
+          </a:bodyPr>
+          <a:lstStyle/>
+          <a:p>
+            <a:r>
+              <a:rPr lang="de-AT" dirty="0" err="1"/>
+              <a:t>False</a:t>
+            </a:r>
+            <a:endParaRPr lang="de-AT" dirty="0"/>
+          </a:p>
+        </p:txBody>
+      </p:sp>
+      <p:sp>
+        <p:nvSpPr>
+          <p:cNvPr id="10" name="Titel 9"/>
+          <p:cNvSpPr>
+            <a:spLocks noGrp="1"/>
+          </p:cNvSpPr>
+          <p:nvPr>
+            <p:ph type="title"/>
+          </p:nvPr>
+        </p:nvSpPr>
+        <p:spPr/>
+        <p:txBody>
+          <a:bodyPr/>
+          <a:lstStyle/>
+          <a:p>
+            <a:r>
+              <a:rPr lang="de-AT" dirty="0"/>
+              <a:t>Einseitige Verzweigung</a:t>
+            </a:r>
+          </a:p>
+        </p:txBody>
+      </p:sp>
+    </p:spTree>
+    <p:extLst>
+      <p:ext uri="{BB962C8B-B14F-4D97-AF65-F5344CB8AC3E}">
+        <p14:creationId xmlns:p14="http://schemas.microsoft.com/office/powerpoint/2010/main" val="2666897657"/>
+      </p:ext>
+    </p:extLst>
+  </p:cSld>
+  <p:clrMapOvr>
+    <a:masterClrMapping/>
+  </p:clrMapOvr>
+</p:sld>
+</file>
+
+<file path=ppt/slides/slide11.xml><?xml version="1.0" encoding="utf-8"?>
+<p:sld xmlns:a="http://schemas.openxmlformats.org/drawingml/2006/main" xmlns:r="http://schemas.openxmlformats.org/officeDocument/2006/relationships" xmlns:p="http://schemas.openxmlformats.org/presentationml/2006/main">
+  <p:cSld>
+    <p:bg>
+      <p:bgPr>
+        <a:solidFill>
+          <a:schemeClr val="bg1"/>
+        </a:solidFill>
+        <a:effectLst/>
+      </p:bgPr>
+    </p:bg>
+    <p:spTree>
+      <p:nvGrpSpPr>
+        <p:cNvPr id="1" name=""/>
+        <p:cNvGrpSpPr/>
+        <p:nvPr/>
+      </p:nvGrpSpPr>
+      <p:grpSpPr>
+        <a:xfrm>
+          <a:off x="0" y="0"/>
+          <a:ext cx="0" cy="0"/>
+          <a:chOff x="0" y="0"/>
+          <a:chExt cx="0" cy="0"/>
+        </a:xfrm>
+      </p:grpSpPr>
+      <p:sp>
+        <p:nvSpPr>
+          <p:cNvPr id="7" name="Textfeld 6"/>
+          <p:cNvSpPr txBox="1"/>
+          <p:nvPr/>
+        </p:nvSpPr>
+        <p:spPr>
+          <a:xfrm>
             <a:off x="597521" y="1412776"/>
             <a:ext cx="7453259" cy="646331"/>
           </a:xfrm>
@@ -2557,7 +3054,7 @@
 </p:sld>
 </file>
 
-<file path=ppt/slides/slide11.xml><?xml version="1.0" encoding="utf-8"?>
+<file path=ppt/slides/slide12.xml><?xml version="1.0" encoding="utf-8"?>
 <p:sld xmlns:a="http://schemas.openxmlformats.org/drawingml/2006/main" xmlns:r="http://schemas.openxmlformats.org/officeDocument/2006/relationships" xmlns:p="http://schemas.openxmlformats.org/presentationml/2006/main">
   <p:cSld>
     <p:bg>
@@ -3212,7 +3709,7 @@
 </p:sld>
 </file>
 
-<file path=ppt/slides/slide12.xml><?xml version="1.0" encoding="utf-8"?>
+<file path=ppt/slides/slide13.xml><?xml version="1.0" encoding="utf-8"?>
 <p:sld xmlns:a="http://schemas.openxmlformats.org/drawingml/2006/main" xmlns:r="http://schemas.openxmlformats.org/officeDocument/2006/relationships" xmlns:p="http://schemas.openxmlformats.org/presentationml/2006/main">
   <p:cSld>
     <p:bg>
@@ -3601,7 +4098,7 @@
 </p:sld>
 </file>
 
-<file path=ppt/slides/slide13.xml><?xml version="1.0" encoding="utf-8"?>
+<file path=ppt/slides/slide14.xml><?xml version="1.0" encoding="utf-8"?>
 <p:sld xmlns:a="http://schemas.openxmlformats.org/drawingml/2006/main" xmlns:r="http://schemas.openxmlformats.org/officeDocument/2006/relationships" xmlns:p="http://schemas.openxmlformats.org/presentationml/2006/main">
   <p:cSld>
     <p:bg>
@@ -3956,7 +4453,7 @@
 </p:sld>
 </file>
 
-<file path=ppt/slides/slide14.xml><?xml version="1.0" encoding="utf-8"?>
+<file path=ppt/slides/slide15.xml><?xml version="1.0" encoding="utf-8"?>
 <p:sld xmlns:a="http://schemas.openxmlformats.org/drawingml/2006/main" xmlns:r="http://schemas.openxmlformats.org/officeDocument/2006/relationships" xmlns:p="http://schemas.openxmlformats.org/presentationml/2006/main">
   <p:cSld>
     <p:spTree>
@@ -4440,7 +4937,7 @@
 </p:sld>
 </file>
 
-<file path=ppt/slides/slide15.xml><?xml version="1.0" encoding="utf-8"?>
+<file path=ppt/slides/slide16.xml><?xml version="1.0" encoding="utf-8"?>
 <p:sld xmlns:a="http://schemas.openxmlformats.org/drawingml/2006/main" xmlns:r="http://schemas.openxmlformats.org/officeDocument/2006/relationships" xmlns:p="http://schemas.openxmlformats.org/presentationml/2006/main">
   <p:cSld>
     <p:bg>
@@ -5398,7 +5895,7 @@
 </p:sld>
 </file>
 
-<file path=ppt/slides/slide16.xml><?xml version="1.0" encoding="utf-8"?>
+<file path=ppt/slides/slide17.xml><?xml version="1.0" encoding="utf-8"?>
 <p:sld xmlns:a="http://schemas.openxmlformats.org/drawingml/2006/main" xmlns:r="http://schemas.openxmlformats.org/officeDocument/2006/relationships" xmlns:p="http://schemas.openxmlformats.org/presentationml/2006/main">
   <p:cSld>
     <p:bg>
@@ -5964,7 +6461,7 @@
 </p:sld>
 </file>
 
-<file path=ppt/slides/slide17.xml><?xml version="1.0" encoding="utf-8"?>
+<file path=ppt/slides/slide18.xml><?xml version="1.0" encoding="utf-8"?>
 <p:sld xmlns:a="http://schemas.openxmlformats.org/drawingml/2006/main" xmlns:r="http://schemas.openxmlformats.org/officeDocument/2006/relationships" xmlns:p="http://schemas.openxmlformats.org/presentationml/2006/main">
   <p:cSld>
     <p:bg>
@@ -6877,7 +7374,7 @@
 </p:sld>
 </file>
 
-<file path=ppt/slides/slide18.xml><?xml version="1.0" encoding="utf-8"?>
+<file path=ppt/slides/slide19.xml><?xml version="1.0" encoding="utf-8"?>
 <p:sld xmlns:a="http://schemas.openxmlformats.org/drawingml/2006/main" xmlns:r="http://schemas.openxmlformats.org/officeDocument/2006/relationships" xmlns:p="http://schemas.openxmlformats.org/presentationml/2006/main">
   <p:cSld>
     <p:bg>
@@ -7570,7 +8067,499 @@
 </p:sld>
 </file>
 
-<file path=ppt/slides/slide19.xml><?xml version="1.0" encoding="utf-8"?>
+<file path=ppt/slides/slide2.xml><?xml version="1.0" encoding="utf-8"?>
+<p:sld xmlns:a="http://schemas.openxmlformats.org/drawingml/2006/main" xmlns:r="http://schemas.openxmlformats.org/officeDocument/2006/relationships" xmlns:p="http://schemas.openxmlformats.org/presentationml/2006/main">
+  <p:cSld>
+    <p:spTree>
+      <p:nvGrpSpPr>
+        <p:cNvPr id="1" name=""/>
+        <p:cNvGrpSpPr/>
+        <p:nvPr/>
+      </p:nvGrpSpPr>
+      <p:grpSpPr>
+        <a:xfrm>
+          <a:off x="0" y="0"/>
+          <a:ext cx="0" cy="0"/>
+          <a:chOff x="0" y="0"/>
+          <a:chExt cx="0" cy="0"/>
+        </a:xfrm>
+      </p:grpSpPr>
+      <p:sp>
+        <p:nvSpPr>
+          <p:cNvPr id="72" name="Shape 72"/>
+          <p:cNvSpPr>
+            <a:spLocks noGrp="1"/>
+          </p:cNvSpPr>
+          <p:nvPr>
+            <p:ph type="body" idx="1"/>
+          </p:nvPr>
+        </p:nvSpPr>
+        <p:spPr>
+          <a:xfrm>
+            <a:off x="250031" y="1484784"/>
+            <a:ext cx="8643938" cy="4772645"/>
+          </a:xfrm>
+          <a:prstGeom prst="rect">
+            <a:avLst/>
+          </a:prstGeom>
+        </p:spPr>
+        <p:txBody>
+          <a:bodyPr lIns="0" tIns="0" rIns="0" bIns="0">
+            <a:normAutofit/>
+          </a:bodyPr>
+          <a:lstStyle/>
+          <a:p>
+            <a:pPr marL="0" indent="0">
+              <a:buNone/>
+            </a:pPr>
+            <a:r>
+              <a:rPr lang="de-AT" sz="1800" dirty="0" err="1">
+                <a:solidFill>
+                  <a:srgbClr val="0000FF"/>
+                </a:solidFill>
+                <a:latin typeface="Consolas" panose="020B0609020204030204" pitchFamily="49" charset="0"/>
+              </a:rPr>
+              <a:t>using</a:t>
+            </a:r>
+            <a:r>
+              <a:rPr lang="de-AT" sz="1800" dirty="0">
+                <a:solidFill>
+                  <a:srgbClr val="000000"/>
+                </a:solidFill>
+                <a:latin typeface="Consolas" panose="020B0609020204030204" pitchFamily="49" charset="0"/>
+              </a:rPr>
+              <a:t> System;</a:t>
+            </a:r>
+          </a:p>
+          <a:p>
+            <a:pPr marL="0" indent="0">
+              <a:buNone/>
+            </a:pPr>
+            <a:endParaRPr lang="de-AT" sz="1800" dirty="0">
+              <a:solidFill>
+                <a:srgbClr val="000000"/>
+              </a:solidFill>
+              <a:latin typeface="Consolas" panose="020B0609020204030204" pitchFamily="49" charset="0"/>
+            </a:endParaRPr>
+          </a:p>
+          <a:p>
+            <a:pPr marL="0" indent="0">
+              <a:buNone/>
+            </a:pPr>
+            <a:r>
+              <a:rPr lang="de-AT" sz="1800" dirty="0" err="1">
+                <a:solidFill>
+                  <a:srgbClr val="0000FF"/>
+                </a:solidFill>
+                <a:latin typeface="Consolas" panose="020B0609020204030204" pitchFamily="49" charset="0"/>
+              </a:rPr>
+              <a:t>const</a:t>
+            </a:r>
+            <a:r>
+              <a:rPr lang="de-AT" sz="1800" dirty="0">
+                <a:solidFill>
+                  <a:srgbClr val="000000"/>
+                </a:solidFill>
+                <a:latin typeface="Consolas" panose="020B0609020204030204" pitchFamily="49" charset="0"/>
+              </a:rPr>
+              <a:t> </a:t>
+            </a:r>
+            <a:r>
+              <a:rPr lang="de-AT" sz="1800" dirty="0" err="1">
+                <a:solidFill>
+                  <a:srgbClr val="0000FF"/>
+                </a:solidFill>
+                <a:latin typeface="Consolas" panose="020B0609020204030204" pitchFamily="49" charset="0"/>
+              </a:rPr>
+              <a:t>int</a:t>
+            </a:r>
+            <a:r>
+              <a:rPr lang="de-AT" sz="1800" dirty="0">
+                <a:solidFill>
+                  <a:srgbClr val="000000"/>
+                </a:solidFill>
+                <a:latin typeface="Consolas" panose="020B0609020204030204" pitchFamily="49" charset="0"/>
+              </a:rPr>
+              <a:t> GROWN_UP_AGE = 18;</a:t>
+            </a:r>
+          </a:p>
+          <a:p>
+            <a:pPr marL="0" indent="0">
+              <a:buNone/>
+            </a:pPr>
+            <a:endParaRPr lang="de-AT" sz="1800" dirty="0">
+              <a:solidFill>
+                <a:srgbClr val="000000"/>
+              </a:solidFill>
+              <a:latin typeface="Consolas" panose="020B0609020204030204" pitchFamily="49" charset="0"/>
+            </a:endParaRPr>
+          </a:p>
+          <a:p>
+            <a:pPr marL="0" indent="0">
+              <a:buNone/>
+            </a:pPr>
+            <a:r>
+              <a:rPr lang="en-US" sz="1800" dirty="0" err="1">
+                <a:solidFill>
+                  <a:srgbClr val="000000"/>
+                </a:solidFill>
+                <a:latin typeface="Consolas" panose="020B0609020204030204" pitchFamily="49" charset="0"/>
+              </a:rPr>
+              <a:t>Console.Write</a:t>
+            </a:r>
+            <a:r>
+              <a:rPr lang="en-US" sz="1800" dirty="0">
+                <a:solidFill>
+                  <a:srgbClr val="000000"/>
+                </a:solidFill>
+                <a:latin typeface="Consolas" panose="020B0609020204030204" pitchFamily="49" charset="0"/>
+              </a:rPr>
+              <a:t>(</a:t>
+            </a:r>
+            <a:r>
+              <a:rPr lang="en-US" sz="1800" dirty="0">
+                <a:solidFill>
+                  <a:srgbClr val="A31515"/>
+                </a:solidFill>
+                <a:latin typeface="Consolas" panose="020B0609020204030204" pitchFamily="49" charset="0"/>
+              </a:rPr>
+              <a:t>"How old are you? "</a:t>
+            </a:r>
+            <a:r>
+              <a:rPr lang="en-US" sz="1800" dirty="0">
+                <a:solidFill>
+                  <a:srgbClr val="000000"/>
+                </a:solidFill>
+                <a:latin typeface="Consolas" panose="020B0609020204030204" pitchFamily="49" charset="0"/>
+              </a:rPr>
+              <a:t>);</a:t>
+            </a:r>
+          </a:p>
+          <a:p>
+            <a:pPr marL="0" indent="0">
+              <a:buNone/>
+            </a:pPr>
+            <a:r>
+              <a:rPr lang="de-AT" sz="1800" dirty="0" err="1">
+                <a:solidFill>
+                  <a:srgbClr val="0000FF"/>
+                </a:solidFill>
+                <a:latin typeface="Consolas" panose="020B0609020204030204" pitchFamily="49" charset="0"/>
+              </a:rPr>
+              <a:t>string</a:t>
+            </a:r>
+            <a:r>
+              <a:rPr lang="de-AT" sz="1800" dirty="0">
+                <a:solidFill>
+                  <a:srgbClr val="000000"/>
+                </a:solidFill>
+                <a:latin typeface="Consolas" panose="020B0609020204030204" pitchFamily="49" charset="0"/>
+              </a:rPr>
+              <a:t> </a:t>
+            </a:r>
+            <a:r>
+              <a:rPr lang="de-AT" sz="1800" dirty="0" err="1">
+                <a:solidFill>
+                  <a:srgbClr val="000000"/>
+                </a:solidFill>
+                <a:latin typeface="Consolas" panose="020B0609020204030204" pitchFamily="49" charset="0"/>
+              </a:rPr>
+              <a:t>userInput</a:t>
+            </a:r>
+            <a:r>
+              <a:rPr lang="de-AT" sz="1800" dirty="0">
+                <a:solidFill>
+                  <a:srgbClr val="000000"/>
+                </a:solidFill>
+                <a:latin typeface="Consolas" panose="020B0609020204030204" pitchFamily="49" charset="0"/>
+              </a:rPr>
+              <a:t> = </a:t>
+            </a:r>
+            <a:r>
+              <a:rPr lang="de-AT" sz="1800" dirty="0" err="1">
+                <a:solidFill>
+                  <a:srgbClr val="000000"/>
+                </a:solidFill>
+                <a:latin typeface="Consolas" panose="020B0609020204030204" pitchFamily="49" charset="0"/>
+              </a:rPr>
+              <a:t>Console.ReadLine</a:t>
+            </a:r>
+            <a:r>
+              <a:rPr lang="de-AT" sz="1800" dirty="0">
+                <a:solidFill>
+                  <a:srgbClr val="000000"/>
+                </a:solidFill>
+                <a:latin typeface="Consolas" panose="020B0609020204030204" pitchFamily="49" charset="0"/>
+              </a:rPr>
+              <a:t>();</a:t>
+            </a:r>
+          </a:p>
+          <a:p>
+            <a:pPr marL="0" indent="0">
+              <a:buNone/>
+            </a:pPr>
+            <a:r>
+              <a:rPr lang="de-AT" sz="1800" dirty="0" err="1">
+                <a:solidFill>
+                  <a:srgbClr val="0000FF"/>
+                </a:solidFill>
+                <a:latin typeface="Consolas" panose="020B0609020204030204" pitchFamily="49" charset="0"/>
+              </a:rPr>
+              <a:t>int</a:t>
+            </a:r>
+            <a:r>
+              <a:rPr lang="de-AT" sz="1800" dirty="0">
+                <a:solidFill>
+                  <a:srgbClr val="000000"/>
+                </a:solidFill>
+                <a:latin typeface="Consolas" panose="020B0609020204030204" pitchFamily="49" charset="0"/>
+              </a:rPr>
+              <a:t> </a:t>
+            </a:r>
+            <a:r>
+              <a:rPr lang="de-AT" sz="1800" dirty="0" err="1">
+                <a:solidFill>
+                  <a:srgbClr val="000000"/>
+                </a:solidFill>
+                <a:latin typeface="Consolas" panose="020B0609020204030204" pitchFamily="49" charset="0"/>
+              </a:rPr>
+              <a:t>age</a:t>
+            </a:r>
+            <a:r>
+              <a:rPr lang="de-AT" sz="1800" dirty="0">
+                <a:solidFill>
+                  <a:srgbClr val="000000"/>
+                </a:solidFill>
+                <a:latin typeface="Consolas" panose="020B0609020204030204" pitchFamily="49" charset="0"/>
+              </a:rPr>
+              <a:t> = Convert.ToInt32(</a:t>
+            </a:r>
+            <a:r>
+              <a:rPr lang="de-AT" sz="1800" dirty="0" err="1">
+                <a:solidFill>
+                  <a:srgbClr val="000000"/>
+                </a:solidFill>
+                <a:latin typeface="Consolas" panose="020B0609020204030204" pitchFamily="49" charset="0"/>
+              </a:rPr>
+              <a:t>userInput</a:t>
+            </a:r>
+            <a:r>
+              <a:rPr lang="de-AT" sz="1800" dirty="0">
+                <a:solidFill>
+                  <a:srgbClr val="000000"/>
+                </a:solidFill>
+                <a:latin typeface="Consolas" panose="020B0609020204030204" pitchFamily="49" charset="0"/>
+              </a:rPr>
+              <a:t>);</a:t>
+            </a:r>
+          </a:p>
+          <a:p>
+            <a:pPr marL="0" indent="0">
+              <a:buNone/>
+            </a:pPr>
+            <a:endParaRPr lang="de-AT" sz="1800" dirty="0">
+              <a:solidFill>
+                <a:srgbClr val="000000"/>
+              </a:solidFill>
+              <a:latin typeface="Consolas" panose="020B0609020204030204" pitchFamily="49" charset="0"/>
+            </a:endParaRPr>
+          </a:p>
+          <a:p>
+            <a:pPr marL="0" indent="0">
+              <a:buNone/>
+            </a:pPr>
+            <a:r>
+              <a:rPr lang="de-AT" sz="1800" dirty="0" err="1">
+                <a:solidFill>
+                  <a:srgbClr val="0000FF"/>
+                </a:solidFill>
+                <a:latin typeface="Consolas" panose="020B0609020204030204" pitchFamily="49" charset="0"/>
+              </a:rPr>
+              <a:t>int</a:t>
+            </a:r>
+            <a:r>
+              <a:rPr lang="de-AT" sz="1800" dirty="0">
+                <a:solidFill>
+                  <a:srgbClr val="000000"/>
+                </a:solidFill>
+                <a:latin typeface="Consolas" panose="020B0609020204030204" pitchFamily="49" charset="0"/>
+              </a:rPr>
+              <a:t> </a:t>
+            </a:r>
+            <a:r>
+              <a:rPr lang="de-AT" sz="1800" dirty="0" err="1">
+                <a:solidFill>
+                  <a:srgbClr val="000000"/>
+                </a:solidFill>
+                <a:latin typeface="Consolas" panose="020B0609020204030204" pitchFamily="49" charset="0"/>
+              </a:rPr>
+              <a:t>diff</a:t>
+            </a:r>
+            <a:r>
+              <a:rPr lang="de-AT" sz="1800" dirty="0">
+                <a:solidFill>
+                  <a:srgbClr val="000000"/>
+                </a:solidFill>
+                <a:latin typeface="Consolas" panose="020B0609020204030204" pitchFamily="49" charset="0"/>
+              </a:rPr>
+              <a:t> = GROWN_UP_AGE - </a:t>
+            </a:r>
+            <a:r>
+              <a:rPr lang="de-AT" sz="1800" dirty="0" err="1">
+                <a:solidFill>
+                  <a:srgbClr val="000000"/>
+                </a:solidFill>
+                <a:latin typeface="Consolas" panose="020B0609020204030204" pitchFamily="49" charset="0"/>
+              </a:rPr>
+              <a:t>age</a:t>
+            </a:r>
+            <a:r>
+              <a:rPr lang="de-AT" sz="1800" dirty="0">
+                <a:solidFill>
+                  <a:srgbClr val="000000"/>
+                </a:solidFill>
+                <a:latin typeface="Consolas" panose="020B0609020204030204" pitchFamily="49" charset="0"/>
+              </a:rPr>
+              <a:t>;</a:t>
+            </a:r>
+          </a:p>
+          <a:p>
+            <a:pPr marL="0" indent="0">
+              <a:buNone/>
+            </a:pPr>
+            <a:endParaRPr lang="de-AT" sz="1800" dirty="0">
+              <a:solidFill>
+                <a:srgbClr val="000000"/>
+              </a:solidFill>
+              <a:latin typeface="Consolas" panose="020B0609020204030204" pitchFamily="49" charset="0"/>
+            </a:endParaRPr>
+          </a:p>
+          <a:p>
+            <a:pPr marL="0" indent="0">
+              <a:buNone/>
+            </a:pPr>
+            <a:r>
+              <a:rPr lang="en-US" sz="1800" dirty="0" err="1">
+                <a:solidFill>
+                  <a:srgbClr val="000000"/>
+                </a:solidFill>
+                <a:latin typeface="Consolas" panose="020B0609020204030204" pitchFamily="49" charset="0"/>
+              </a:rPr>
+              <a:t>Console.WriteLine</a:t>
+            </a:r>
+            <a:r>
+              <a:rPr lang="en-US" sz="1800" dirty="0">
+                <a:solidFill>
+                  <a:srgbClr val="000000"/>
+                </a:solidFill>
+                <a:latin typeface="Consolas" panose="020B0609020204030204" pitchFamily="49" charset="0"/>
+              </a:rPr>
+              <a:t>($</a:t>
+            </a:r>
+            <a:r>
+              <a:rPr lang="en-US" sz="1800" dirty="0">
+                <a:solidFill>
+                  <a:srgbClr val="A31515"/>
+                </a:solidFill>
+                <a:latin typeface="Consolas" panose="020B0609020204030204" pitchFamily="49" charset="0"/>
+              </a:rPr>
+              <a:t>"In approx. </a:t>
+            </a:r>
+            <a:r>
+              <a:rPr lang="en-US" sz="1800" dirty="0">
+                <a:solidFill>
+                  <a:schemeClr val="tx1"/>
+                </a:solidFill>
+                <a:latin typeface="Consolas" panose="020B0609020204030204" pitchFamily="49" charset="0"/>
+              </a:rPr>
+              <a:t>{</a:t>
+            </a:r>
+            <a:r>
+              <a:rPr lang="en-US" sz="1800" dirty="0">
+                <a:solidFill>
+                  <a:srgbClr val="000000"/>
+                </a:solidFill>
+                <a:latin typeface="Consolas" panose="020B0609020204030204" pitchFamily="49" charset="0"/>
+              </a:rPr>
+              <a:t>diff}</a:t>
+            </a:r>
+            <a:r>
+              <a:rPr lang="en-US" sz="1800" dirty="0">
+                <a:solidFill>
+                  <a:srgbClr val="A31515"/>
+                </a:solidFill>
+                <a:latin typeface="Consolas" panose="020B0609020204030204" pitchFamily="49" charset="0"/>
+              </a:rPr>
+              <a:t> years you will be grown-up"</a:t>
+            </a:r>
+            <a:r>
+              <a:rPr lang="en-US" sz="1800" dirty="0">
+                <a:solidFill>
+                  <a:srgbClr val="000000"/>
+                </a:solidFill>
+                <a:latin typeface="Consolas" panose="020B0609020204030204" pitchFamily="49" charset="0"/>
+              </a:rPr>
+              <a:t>);</a:t>
+            </a:r>
+          </a:p>
+          <a:p>
+            <a:pPr marL="0" indent="0" defTabSz="402536">
+              <a:lnSpc>
+                <a:spcPct val="50000"/>
+              </a:lnSpc>
+              <a:spcBef>
+                <a:spcPts val="1406"/>
+              </a:spcBef>
+              <a:buSzTx/>
+              <a:buNone/>
+              <a:defRPr sz="1800"/>
+            </a:pPr>
+            <a:endParaRPr sz="2067" dirty="0">
+              <a:latin typeface="Courier New" panose="02070309020205020404" pitchFamily="49" charset="0"/>
+              <a:ea typeface="Monaco"/>
+              <a:cs typeface="Courier New" panose="02070309020205020404" pitchFamily="49" charset="0"/>
+              <a:sym typeface="Monaco"/>
+            </a:endParaRPr>
+          </a:p>
+        </p:txBody>
+      </p:sp>
+      <p:sp>
+        <p:nvSpPr>
+          <p:cNvPr id="2" name="Titel 1"/>
+          <p:cNvSpPr>
+            <a:spLocks noGrp="1"/>
+          </p:cNvSpPr>
+          <p:nvPr>
+            <p:ph type="title"/>
+          </p:nvPr>
+        </p:nvSpPr>
+        <p:spPr/>
+        <p:txBody>
+          <a:bodyPr/>
+          <a:lstStyle/>
+          <a:p>
+            <a:r>
+              <a:rPr lang="de-AT" dirty="0"/>
+              <a:t>Der einfache Teil</a:t>
+            </a:r>
+          </a:p>
+        </p:txBody>
+      </p:sp>
+    </p:spTree>
+    <p:extLst>
+      <p:ext uri="{BB962C8B-B14F-4D97-AF65-F5344CB8AC3E}">
+        <p14:creationId xmlns:p14="http://schemas.microsoft.com/office/powerpoint/2010/main" val="805754609"/>
+      </p:ext>
+    </p:extLst>
+  </p:cSld>
+  <p:clrMapOvr>
+    <a:masterClrMapping/>
+  </p:clrMapOvr>
+  <p:transition spd="med"/>
+</p:sld>
+</file>
+
+<file path=ppt/slides/slide20.xml><?xml version="1.0" encoding="utf-8"?>
 <p:sld xmlns:a="http://schemas.openxmlformats.org/drawingml/2006/main" xmlns:r="http://schemas.openxmlformats.org/officeDocument/2006/relationships" xmlns:p="http://schemas.openxmlformats.org/presentationml/2006/main">
   <p:cSld>
     <p:spTree>
@@ -8582,499 +9571,7 @@
 </p:sld>
 </file>
 
-<file path=ppt/slides/slide2.xml><?xml version="1.0" encoding="utf-8"?>
-<p:sld xmlns:a="http://schemas.openxmlformats.org/drawingml/2006/main" xmlns:r="http://schemas.openxmlformats.org/officeDocument/2006/relationships" xmlns:p="http://schemas.openxmlformats.org/presentationml/2006/main">
-  <p:cSld>
-    <p:spTree>
-      <p:nvGrpSpPr>
-        <p:cNvPr id="1" name=""/>
-        <p:cNvGrpSpPr/>
-        <p:nvPr/>
-      </p:nvGrpSpPr>
-      <p:grpSpPr>
-        <a:xfrm>
-          <a:off x="0" y="0"/>
-          <a:ext cx="0" cy="0"/>
-          <a:chOff x="0" y="0"/>
-          <a:chExt cx="0" cy="0"/>
-        </a:xfrm>
-      </p:grpSpPr>
-      <p:sp>
-        <p:nvSpPr>
-          <p:cNvPr id="72" name="Shape 72"/>
-          <p:cNvSpPr>
-            <a:spLocks noGrp="1"/>
-          </p:cNvSpPr>
-          <p:nvPr>
-            <p:ph type="body" idx="1"/>
-          </p:nvPr>
-        </p:nvSpPr>
-        <p:spPr>
-          <a:xfrm>
-            <a:off x="250031" y="1484784"/>
-            <a:ext cx="8643938" cy="4772645"/>
-          </a:xfrm>
-          <a:prstGeom prst="rect">
-            <a:avLst/>
-          </a:prstGeom>
-        </p:spPr>
-        <p:txBody>
-          <a:bodyPr lIns="0" tIns="0" rIns="0" bIns="0">
-            <a:normAutofit/>
-          </a:bodyPr>
-          <a:lstStyle/>
-          <a:p>
-            <a:pPr marL="0" indent="0">
-              <a:buNone/>
-            </a:pPr>
-            <a:r>
-              <a:rPr lang="de-AT" sz="1800" dirty="0" err="1">
-                <a:solidFill>
-                  <a:srgbClr val="0000FF"/>
-                </a:solidFill>
-                <a:latin typeface="Consolas" panose="020B0609020204030204" pitchFamily="49" charset="0"/>
-              </a:rPr>
-              <a:t>using</a:t>
-            </a:r>
-            <a:r>
-              <a:rPr lang="de-AT" sz="1800" dirty="0">
-                <a:solidFill>
-                  <a:srgbClr val="000000"/>
-                </a:solidFill>
-                <a:latin typeface="Consolas" panose="020B0609020204030204" pitchFamily="49" charset="0"/>
-              </a:rPr>
-              <a:t> System;</a:t>
-            </a:r>
-          </a:p>
-          <a:p>
-            <a:pPr marL="0" indent="0">
-              <a:buNone/>
-            </a:pPr>
-            <a:endParaRPr lang="de-AT" sz="1800" dirty="0">
-              <a:solidFill>
-                <a:srgbClr val="000000"/>
-              </a:solidFill>
-              <a:latin typeface="Consolas" panose="020B0609020204030204" pitchFamily="49" charset="0"/>
-            </a:endParaRPr>
-          </a:p>
-          <a:p>
-            <a:pPr marL="0" indent="0">
-              <a:buNone/>
-            </a:pPr>
-            <a:r>
-              <a:rPr lang="de-AT" sz="1800" dirty="0" err="1">
-                <a:solidFill>
-                  <a:srgbClr val="0000FF"/>
-                </a:solidFill>
-                <a:latin typeface="Consolas" panose="020B0609020204030204" pitchFamily="49" charset="0"/>
-              </a:rPr>
-              <a:t>const</a:t>
-            </a:r>
-            <a:r>
-              <a:rPr lang="de-AT" sz="1800" dirty="0">
-                <a:solidFill>
-                  <a:srgbClr val="000000"/>
-                </a:solidFill>
-                <a:latin typeface="Consolas" panose="020B0609020204030204" pitchFamily="49" charset="0"/>
-              </a:rPr>
-              <a:t> </a:t>
-            </a:r>
-            <a:r>
-              <a:rPr lang="de-AT" sz="1800" dirty="0" err="1">
-                <a:solidFill>
-                  <a:srgbClr val="0000FF"/>
-                </a:solidFill>
-                <a:latin typeface="Consolas" panose="020B0609020204030204" pitchFamily="49" charset="0"/>
-              </a:rPr>
-              <a:t>int</a:t>
-            </a:r>
-            <a:r>
-              <a:rPr lang="de-AT" sz="1800" dirty="0">
-                <a:solidFill>
-                  <a:srgbClr val="000000"/>
-                </a:solidFill>
-                <a:latin typeface="Consolas" panose="020B0609020204030204" pitchFamily="49" charset="0"/>
-              </a:rPr>
-              <a:t> GROWN_UP_AGE = 18;</a:t>
-            </a:r>
-          </a:p>
-          <a:p>
-            <a:pPr marL="0" indent="0">
-              <a:buNone/>
-            </a:pPr>
-            <a:endParaRPr lang="de-AT" sz="1800" dirty="0">
-              <a:solidFill>
-                <a:srgbClr val="000000"/>
-              </a:solidFill>
-              <a:latin typeface="Consolas" panose="020B0609020204030204" pitchFamily="49" charset="0"/>
-            </a:endParaRPr>
-          </a:p>
-          <a:p>
-            <a:pPr marL="0" indent="0">
-              <a:buNone/>
-            </a:pPr>
-            <a:r>
-              <a:rPr lang="en-US" sz="1800" dirty="0" err="1">
-                <a:solidFill>
-                  <a:srgbClr val="000000"/>
-                </a:solidFill>
-                <a:latin typeface="Consolas" panose="020B0609020204030204" pitchFamily="49" charset="0"/>
-              </a:rPr>
-              <a:t>Console.Write</a:t>
-            </a:r>
-            <a:r>
-              <a:rPr lang="en-US" sz="1800" dirty="0">
-                <a:solidFill>
-                  <a:srgbClr val="000000"/>
-                </a:solidFill>
-                <a:latin typeface="Consolas" panose="020B0609020204030204" pitchFamily="49" charset="0"/>
-              </a:rPr>
-              <a:t>(</a:t>
-            </a:r>
-            <a:r>
-              <a:rPr lang="en-US" sz="1800" dirty="0">
-                <a:solidFill>
-                  <a:srgbClr val="A31515"/>
-                </a:solidFill>
-                <a:latin typeface="Consolas" panose="020B0609020204030204" pitchFamily="49" charset="0"/>
-              </a:rPr>
-              <a:t>"How old are you? "</a:t>
-            </a:r>
-            <a:r>
-              <a:rPr lang="en-US" sz="1800" dirty="0">
-                <a:solidFill>
-                  <a:srgbClr val="000000"/>
-                </a:solidFill>
-                <a:latin typeface="Consolas" panose="020B0609020204030204" pitchFamily="49" charset="0"/>
-              </a:rPr>
-              <a:t>);</a:t>
-            </a:r>
-          </a:p>
-          <a:p>
-            <a:pPr marL="0" indent="0">
-              <a:buNone/>
-            </a:pPr>
-            <a:r>
-              <a:rPr lang="de-AT" sz="1800" dirty="0" err="1">
-                <a:solidFill>
-                  <a:srgbClr val="0000FF"/>
-                </a:solidFill>
-                <a:latin typeface="Consolas" panose="020B0609020204030204" pitchFamily="49" charset="0"/>
-              </a:rPr>
-              <a:t>string</a:t>
-            </a:r>
-            <a:r>
-              <a:rPr lang="de-AT" sz="1800" dirty="0">
-                <a:solidFill>
-                  <a:srgbClr val="000000"/>
-                </a:solidFill>
-                <a:latin typeface="Consolas" panose="020B0609020204030204" pitchFamily="49" charset="0"/>
-              </a:rPr>
-              <a:t> </a:t>
-            </a:r>
-            <a:r>
-              <a:rPr lang="de-AT" sz="1800" dirty="0" err="1">
-                <a:solidFill>
-                  <a:srgbClr val="000000"/>
-                </a:solidFill>
-                <a:latin typeface="Consolas" panose="020B0609020204030204" pitchFamily="49" charset="0"/>
-              </a:rPr>
-              <a:t>userInput</a:t>
-            </a:r>
-            <a:r>
-              <a:rPr lang="de-AT" sz="1800" dirty="0">
-                <a:solidFill>
-                  <a:srgbClr val="000000"/>
-                </a:solidFill>
-                <a:latin typeface="Consolas" panose="020B0609020204030204" pitchFamily="49" charset="0"/>
-              </a:rPr>
-              <a:t> = </a:t>
-            </a:r>
-            <a:r>
-              <a:rPr lang="de-AT" sz="1800" dirty="0" err="1">
-                <a:solidFill>
-                  <a:srgbClr val="000000"/>
-                </a:solidFill>
-                <a:latin typeface="Consolas" panose="020B0609020204030204" pitchFamily="49" charset="0"/>
-              </a:rPr>
-              <a:t>Console.ReadLine</a:t>
-            </a:r>
-            <a:r>
-              <a:rPr lang="de-AT" sz="1800" dirty="0">
-                <a:solidFill>
-                  <a:srgbClr val="000000"/>
-                </a:solidFill>
-                <a:latin typeface="Consolas" panose="020B0609020204030204" pitchFamily="49" charset="0"/>
-              </a:rPr>
-              <a:t>();</a:t>
-            </a:r>
-          </a:p>
-          <a:p>
-            <a:pPr marL="0" indent="0">
-              <a:buNone/>
-            </a:pPr>
-            <a:r>
-              <a:rPr lang="de-AT" sz="1800" dirty="0" err="1">
-                <a:solidFill>
-                  <a:srgbClr val="0000FF"/>
-                </a:solidFill>
-                <a:latin typeface="Consolas" panose="020B0609020204030204" pitchFamily="49" charset="0"/>
-              </a:rPr>
-              <a:t>int</a:t>
-            </a:r>
-            <a:r>
-              <a:rPr lang="de-AT" sz="1800" dirty="0">
-                <a:solidFill>
-                  <a:srgbClr val="000000"/>
-                </a:solidFill>
-                <a:latin typeface="Consolas" panose="020B0609020204030204" pitchFamily="49" charset="0"/>
-              </a:rPr>
-              <a:t> </a:t>
-            </a:r>
-            <a:r>
-              <a:rPr lang="de-AT" sz="1800" dirty="0" err="1">
-                <a:solidFill>
-                  <a:srgbClr val="000000"/>
-                </a:solidFill>
-                <a:latin typeface="Consolas" panose="020B0609020204030204" pitchFamily="49" charset="0"/>
-              </a:rPr>
-              <a:t>age</a:t>
-            </a:r>
-            <a:r>
-              <a:rPr lang="de-AT" sz="1800" dirty="0">
-                <a:solidFill>
-                  <a:srgbClr val="000000"/>
-                </a:solidFill>
-                <a:latin typeface="Consolas" panose="020B0609020204030204" pitchFamily="49" charset="0"/>
-              </a:rPr>
-              <a:t> = Convert.ToInt32(</a:t>
-            </a:r>
-            <a:r>
-              <a:rPr lang="de-AT" sz="1800" dirty="0" err="1">
-                <a:solidFill>
-                  <a:srgbClr val="000000"/>
-                </a:solidFill>
-                <a:latin typeface="Consolas" panose="020B0609020204030204" pitchFamily="49" charset="0"/>
-              </a:rPr>
-              <a:t>userInput</a:t>
-            </a:r>
-            <a:r>
-              <a:rPr lang="de-AT" sz="1800" dirty="0">
-                <a:solidFill>
-                  <a:srgbClr val="000000"/>
-                </a:solidFill>
-                <a:latin typeface="Consolas" panose="020B0609020204030204" pitchFamily="49" charset="0"/>
-              </a:rPr>
-              <a:t>);</a:t>
-            </a:r>
-          </a:p>
-          <a:p>
-            <a:pPr marL="0" indent="0">
-              <a:buNone/>
-            </a:pPr>
-            <a:endParaRPr lang="de-AT" sz="1800" dirty="0">
-              <a:solidFill>
-                <a:srgbClr val="000000"/>
-              </a:solidFill>
-              <a:latin typeface="Consolas" panose="020B0609020204030204" pitchFamily="49" charset="0"/>
-            </a:endParaRPr>
-          </a:p>
-          <a:p>
-            <a:pPr marL="0" indent="0">
-              <a:buNone/>
-            </a:pPr>
-            <a:r>
-              <a:rPr lang="de-AT" sz="1800" dirty="0" err="1">
-                <a:solidFill>
-                  <a:srgbClr val="0000FF"/>
-                </a:solidFill>
-                <a:latin typeface="Consolas" panose="020B0609020204030204" pitchFamily="49" charset="0"/>
-              </a:rPr>
-              <a:t>int</a:t>
-            </a:r>
-            <a:r>
-              <a:rPr lang="de-AT" sz="1800" dirty="0">
-                <a:solidFill>
-                  <a:srgbClr val="000000"/>
-                </a:solidFill>
-                <a:latin typeface="Consolas" panose="020B0609020204030204" pitchFamily="49" charset="0"/>
-              </a:rPr>
-              <a:t> </a:t>
-            </a:r>
-            <a:r>
-              <a:rPr lang="de-AT" sz="1800" dirty="0" err="1">
-                <a:solidFill>
-                  <a:srgbClr val="000000"/>
-                </a:solidFill>
-                <a:latin typeface="Consolas" panose="020B0609020204030204" pitchFamily="49" charset="0"/>
-              </a:rPr>
-              <a:t>diff</a:t>
-            </a:r>
-            <a:r>
-              <a:rPr lang="de-AT" sz="1800" dirty="0">
-                <a:solidFill>
-                  <a:srgbClr val="000000"/>
-                </a:solidFill>
-                <a:latin typeface="Consolas" panose="020B0609020204030204" pitchFamily="49" charset="0"/>
-              </a:rPr>
-              <a:t> = GROWN_UP_AGE - </a:t>
-            </a:r>
-            <a:r>
-              <a:rPr lang="de-AT" sz="1800" dirty="0" err="1">
-                <a:solidFill>
-                  <a:srgbClr val="000000"/>
-                </a:solidFill>
-                <a:latin typeface="Consolas" panose="020B0609020204030204" pitchFamily="49" charset="0"/>
-              </a:rPr>
-              <a:t>age</a:t>
-            </a:r>
-            <a:r>
-              <a:rPr lang="de-AT" sz="1800" dirty="0">
-                <a:solidFill>
-                  <a:srgbClr val="000000"/>
-                </a:solidFill>
-                <a:latin typeface="Consolas" panose="020B0609020204030204" pitchFamily="49" charset="0"/>
-              </a:rPr>
-              <a:t>;</a:t>
-            </a:r>
-          </a:p>
-          <a:p>
-            <a:pPr marL="0" indent="0">
-              <a:buNone/>
-            </a:pPr>
-            <a:endParaRPr lang="de-AT" sz="1800" dirty="0">
-              <a:solidFill>
-                <a:srgbClr val="000000"/>
-              </a:solidFill>
-              <a:latin typeface="Consolas" panose="020B0609020204030204" pitchFamily="49" charset="0"/>
-            </a:endParaRPr>
-          </a:p>
-          <a:p>
-            <a:pPr marL="0" indent="0">
-              <a:buNone/>
-            </a:pPr>
-            <a:r>
-              <a:rPr lang="en-US" sz="1800" dirty="0" err="1">
-                <a:solidFill>
-                  <a:srgbClr val="000000"/>
-                </a:solidFill>
-                <a:latin typeface="Consolas" panose="020B0609020204030204" pitchFamily="49" charset="0"/>
-              </a:rPr>
-              <a:t>Console.WriteLine</a:t>
-            </a:r>
-            <a:r>
-              <a:rPr lang="en-US" sz="1800" dirty="0">
-                <a:solidFill>
-                  <a:srgbClr val="000000"/>
-                </a:solidFill>
-                <a:latin typeface="Consolas" panose="020B0609020204030204" pitchFamily="49" charset="0"/>
-              </a:rPr>
-              <a:t>($</a:t>
-            </a:r>
-            <a:r>
-              <a:rPr lang="en-US" sz="1800" dirty="0">
-                <a:solidFill>
-                  <a:srgbClr val="A31515"/>
-                </a:solidFill>
-                <a:latin typeface="Consolas" panose="020B0609020204030204" pitchFamily="49" charset="0"/>
-              </a:rPr>
-              <a:t>"In approx. </a:t>
-            </a:r>
-            <a:r>
-              <a:rPr lang="en-US" sz="1800" dirty="0">
-                <a:solidFill>
-                  <a:schemeClr val="tx1"/>
-                </a:solidFill>
-                <a:latin typeface="Consolas" panose="020B0609020204030204" pitchFamily="49" charset="0"/>
-              </a:rPr>
-              <a:t>{</a:t>
-            </a:r>
-            <a:r>
-              <a:rPr lang="en-US" sz="1800" dirty="0">
-                <a:solidFill>
-                  <a:srgbClr val="000000"/>
-                </a:solidFill>
-                <a:latin typeface="Consolas" panose="020B0609020204030204" pitchFamily="49" charset="0"/>
-              </a:rPr>
-              <a:t>diff}</a:t>
-            </a:r>
-            <a:r>
-              <a:rPr lang="en-US" sz="1800" dirty="0">
-                <a:solidFill>
-                  <a:srgbClr val="A31515"/>
-                </a:solidFill>
-                <a:latin typeface="Consolas" panose="020B0609020204030204" pitchFamily="49" charset="0"/>
-              </a:rPr>
-              <a:t> years you will be grown-up"</a:t>
-            </a:r>
-            <a:r>
-              <a:rPr lang="en-US" sz="1800" dirty="0">
-                <a:solidFill>
-                  <a:srgbClr val="000000"/>
-                </a:solidFill>
-                <a:latin typeface="Consolas" panose="020B0609020204030204" pitchFamily="49" charset="0"/>
-              </a:rPr>
-              <a:t>);</a:t>
-            </a:r>
-          </a:p>
-          <a:p>
-            <a:pPr marL="0" indent="0" defTabSz="402536">
-              <a:lnSpc>
-                <a:spcPct val="50000"/>
-              </a:lnSpc>
-              <a:spcBef>
-                <a:spcPts val="1406"/>
-              </a:spcBef>
-              <a:buSzTx/>
-              <a:buNone/>
-              <a:defRPr sz="1800"/>
-            </a:pPr>
-            <a:endParaRPr sz="2067" dirty="0">
-              <a:latin typeface="Courier New" panose="02070309020205020404" pitchFamily="49" charset="0"/>
-              <a:ea typeface="Monaco"/>
-              <a:cs typeface="Courier New" panose="02070309020205020404" pitchFamily="49" charset="0"/>
-              <a:sym typeface="Monaco"/>
-            </a:endParaRPr>
-          </a:p>
-        </p:txBody>
-      </p:sp>
-      <p:sp>
-        <p:nvSpPr>
-          <p:cNvPr id="2" name="Titel 1"/>
-          <p:cNvSpPr>
-            <a:spLocks noGrp="1"/>
-          </p:cNvSpPr>
-          <p:nvPr>
-            <p:ph type="title"/>
-          </p:nvPr>
-        </p:nvSpPr>
-        <p:spPr/>
-        <p:txBody>
-          <a:bodyPr/>
-          <a:lstStyle/>
-          <a:p>
-            <a:r>
-              <a:rPr lang="de-AT" dirty="0"/>
-              <a:t>Der einfache Teil</a:t>
-            </a:r>
-          </a:p>
-        </p:txBody>
-      </p:sp>
-    </p:spTree>
-    <p:extLst>
-      <p:ext uri="{BB962C8B-B14F-4D97-AF65-F5344CB8AC3E}">
-        <p14:creationId xmlns:p14="http://schemas.microsoft.com/office/powerpoint/2010/main" val="805754609"/>
-      </p:ext>
-    </p:extLst>
-  </p:cSld>
-  <p:clrMapOvr>
-    <a:masterClrMapping/>
-  </p:clrMapOvr>
-  <p:transition spd="med"/>
-</p:sld>
-</file>
-
-<file path=ppt/slides/slide20.xml><?xml version="1.0" encoding="utf-8"?>
+<file path=ppt/slides/slide21.xml><?xml version="1.0" encoding="utf-8"?>
 <p:sld xmlns:a="http://schemas.openxmlformats.org/drawingml/2006/main" xmlns:r="http://schemas.openxmlformats.org/officeDocument/2006/relationships" xmlns:p="http://schemas.openxmlformats.org/presentationml/2006/main">
   <p:cSld>
     <p:spTree>
@@ -10351,7 +10848,7 @@
 </p:sld>
 </file>
 
-<file path=ppt/slides/slide21.xml><?xml version="1.0" encoding="utf-8"?>
+<file path=ppt/slides/slide22.xml><?xml version="1.0" encoding="utf-8"?>
 <p:sld xmlns:a="http://schemas.openxmlformats.org/drawingml/2006/main" xmlns:r="http://schemas.openxmlformats.org/officeDocument/2006/relationships" xmlns:p="http://schemas.openxmlformats.org/presentationml/2006/main">
   <p:cSld>
     <p:bg>
@@ -11346,7 +11843,7 @@
 </p:sld>
 </file>
 
-<file path=ppt/slides/slide22.xml><?xml version="1.0" encoding="utf-8"?>
+<file path=ppt/slides/slide23.xml><?xml version="1.0" encoding="utf-8"?>
 <p:sld xmlns:a="http://schemas.openxmlformats.org/drawingml/2006/main" xmlns:r="http://schemas.openxmlformats.org/officeDocument/2006/relationships" xmlns:p="http://schemas.openxmlformats.org/presentationml/2006/main">
   <p:cSld>
     <p:bg>
@@ -12090,7 +12587,7 @@
           </a:ln>
           <a:extLst>
             <a:ext uri="{C572A759-6A51-4108-AA02-DFA0A04FC94B}">
-              <ma14:wrappingTextBoxFlag xmlns:ma14="http://schemas.microsoft.com/office/mac/drawingml/2011/main" xmlns="" val="1"/>
+              <ma14:wrappingTextBoxFlag xmlns="" xmlns:ma14="http://schemas.microsoft.com/office/mac/drawingml/2011/main" val="1"/>
             </a:ext>
           </a:extLst>
         </p:spPr>
@@ -12140,7 +12637,7 @@
           </a:ln>
           <a:extLst>
             <a:ext uri="{C572A759-6A51-4108-AA02-DFA0A04FC94B}">
-              <ma14:wrappingTextBoxFlag xmlns:ma14="http://schemas.microsoft.com/office/mac/drawingml/2011/main" xmlns="" val="1"/>
+              <ma14:wrappingTextBoxFlag xmlns="" xmlns:ma14="http://schemas.microsoft.com/office/mac/drawingml/2011/main" val="1"/>
             </a:ext>
           </a:extLst>
         </p:spPr>
@@ -12238,7 +12735,7 @@
           </a:ln>
           <a:extLst>
             <a:ext uri="{C572A759-6A51-4108-AA02-DFA0A04FC94B}">
-              <ma14:wrappingTextBoxFlag xmlns:ma14="http://schemas.microsoft.com/office/mac/drawingml/2011/main" xmlns="" val="1"/>
+              <ma14:wrappingTextBoxFlag xmlns="" xmlns:ma14="http://schemas.microsoft.com/office/mac/drawingml/2011/main" val="1"/>
             </a:ext>
           </a:extLst>
         </p:spPr>
@@ -12294,7 +12791,7 @@
           </a:ln>
           <a:extLst>
             <a:ext uri="{C572A759-6A51-4108-AA02-DFA0A04FC94B}">
-              <ma14:wrappingTextBoxFlag xmlns:ma14="http://schemas.microsoft.com/office/mac/drawingml/2011/main" xmlns="" val="1"/>
+              <ma14:wrappingTextBoxFlag xmlns="" xmlns:ma14="http://schemas.microsoft.com/office/mac/drawingml/2011/main" val="1"/>
             </a:ext>
           </a:extLst>
         </p:spPr>
@@ -12358,7 +12855,7 @@
           </a:ln>
           <a:extLst>
             <a:ext uri="{C572A759-6A51-4108-AA02-DFA0A04FC94B}">
-              <ma14:wrappingTextBoxFlag xmlns:ma14="http://schemas.microsoft.com/office/mac/drawingml/2011/main" xmlns="" val="1"/>
+              <ma14:wrappingTextBoxFlag xmlns="" xmlns:ma14="http://schemas.microsoft.com/office/mac/drawingml/2011/main" val="1"/>
             </a:ext>
           </a:extLst>
         </p:spPr>
@@ -12422,7 +12919,7 @@
           </a:ln>
           <a:extLst>
             <a:ext uri="{C572A759-6A51-4108-AA02-DFA0A04FC94B}">
-              <ma14:wrappingTextBoxFlag xmlns:ma14="http://schemas.microsoft.com/office/mac/drawingml/2011/main" xmlns="" val="1"/>
+              <ma14:wrappingTextBoxFlag xmlns="" xmlns:ma14="http://schemas.microsoft.com/office/mac/drawingml/2011/main" val="1"/>
             </a:ext>
           </a:extLst>
         </p:spPr>
@@ -12524,7 +13021,7 @@
           </a:ln>
           <a:extLst>
             <a:ext uri="{C572A759-6A51-4108-AA02-DFA0A04FC94B}">
-              <ma14:wrappingTextBoxFlag xmlns:ma14="http://schemas.microsoft.com/office/mac/drawingml/2011/main" xmlns="" val="1"/>
+              <ma14:wrappingTextBoxFlag xmlns="" xmlns:ma14="http://schemas.microsoft.com/office/mac/drawingml/2011/main" val="1"/>
             </a:ext>
           </a:extLst>
         </p:spPr>
@@ -13059,7 +13556,7 @@
           </a:ln>
           <a:extLst>
             <a:ext uri="{C572A759-6A51-4108-AA02-DFA0A04FC94B}">
-              <ma14:wrappingTextBoxFlag xmlns:ma14="http://schemas.microsoft.com/office/mac/drawingml/2011/main" xmlns="" val="1"/>
+              <ma14:wrappingTextBoxFlag xmlns="" xmlns:ma14="http://schemas.microsoft.com/office/mac/drawingml/2011/main" val="1"/>
             </a:ext>
           </a:extLst>
         </p:spPr>
@@ -13106,7 +13603,7 @@
           </a:ln>
           <a:extLst>
             <a:ext uri="{C572A759-6A51-4108-AA02-DFA0A04FC94B}">
-              <ma14:wrappingTextBoxFlag xmlns:ma14="http://schemas.microsoft.com/office/mac/drawingml/2011/main" xmlns="" val="1"/>
+              <ma14:wrappingTextBoxFlag xmlns="" xmlns:ma14="http://schemas.microsoft.com/office/mac/drawingml/2011/main" val="1"/>
             </a:ext>
           </a:extLst>
         </p:spPr>
@@ -17119,6 +17616,275 @@
           </p:nvPr>
         </p:nvSpPr>
         <p:spPr>
+          <a:xfrm>
+            <a:off x="250031" y="1205508"/>
+            <a:ext cx="8643938" cy="4446984"/>
+          </a:xfrm>
+          <a:prstGeom prst="rect">
+            <a:avLst/>
+          </a:prstGeom>
+        </p:spPr>
+        <p:txBody>
+          <a:bodyPr lIns="0" tIns="0" rIns="0" bIns="0">
+            <a:normAutofit/>
+          </a:bodyPr>
+          <a:lstStyle/>
+          <a:p>
+            <a:pPr marL="0" indent="0">
+              <a:buNone/>
+            </a:pPr>
+            <a:endParaRPr lang="de-AT" sz="1800" dirty="0">
+              <a:solidFill>
+                <a:srgbClr val="000000"/>
+              </a:solidFill>
+              <a:latin typeface="Consolas" panose="020B0609020204030204" pitchFamily="49" charset="0"/>
+            </a:endParaRPr>
+          </a:p>
+          <a:p>
+            <a:pPr marL="0" indent="0">
+              <a:buNone/>
+            </a:pPr>
+            <a:r>
+              <a:rPr lang="en-US" sz="1800" dirty="0">
+                <a:solidFill>
+                  <a:srgbClr val="0000FF"/>
+                </a:solidFill>
+                <a:latin typeface="Consolas" panose="020B0609020204030204" pitchFamily="49" charset="0"/>
+              </a:rPr>
+              <a:t>if</a:t>
+            </a:r>
+            <a:r>
+              <a:rPr lang="en-US" sz="1800" dirty="0">
+                <a:solidFill>
+                  <a:srgbClr val="000000"/>
+                </a:solidFill>
+                <a:latin typeface="Consolas" panose="020B0609020204030204" pitchFamily="49" charset="0"/>
+              </a:rPr>
+              <a:t> (age </a:t>
+            </a:r>
+            <a:r>
+              <a:rPr lang="en-US" sz="1800" dirty="0">
+                <a:solidFill>
+                  <a:srgbClr val="0000FF"/>
+                </a:solidFill>
+                <a:latin typeface="Consolas" panose="020B0609020204030204" pitchFamily="49" charset="0"/>
+              </a:rPr>
+              <a:t>is</a:t>
+            </a:r>
+            <a:r>
+              <a:rPr lang="en-US" sz="1800" dirty="0">
+                <a:solidFill>
+                  <a:srgbClr val="000000"/>
+                </a:solidFill>
+                <a:latin typeface="Consolas" panose="020B0609020204030204" pitchFamily="49" charset="0"/>
+              </a:rPr>
+              <a:t> (&gt;= 18 </a:t>
+            </a:r>
+            <a:r>
+              <a:rPr lang="en-US" sz="1800" dirty="0">
+                <a:solidFill>
+                  <a:srgbClr val="0000FF"/>
+                </a:solidFill>
+                <a:latin typeface="Consolas" panose="020B0609020204030204" pitchFamily="49" charset="0"/>
+              </a:rPr>
+              <a:t>and</a:t>
+            </a:r>
+            <a:r>
+              <a:rPr lang="en-US" sz="1800" dirty="0">
+                <a:solidFill>
+                  <a:srgbClr val="000000"/>
+                </a:solidFill>
+                <a:latin typeface="Consolas" panose="020B0609020204030204" pitchFamily="49" charset="0"/>
+              </a:rPr>
+              <a:t> &lt;= 20))</a:t>
+            </a:r>
+          </a:p>
+          <a:p>
+            <a:pPr marL="0" indent="0">
+              <a:buNone/>
+            </a:pPr>
+            <a:r>
+              <a:rPr lang="de-AT" sz="1800" dirty="0">
+                <a:solidFill>
+                  <a:srgbClr val="000000"/>
+                </a:solidFill>
+                <a:latin typeface="Consolas" panose="020B0609020204030204" pitchFamily="49" charset="0"/>
+              </a:rPr>
+              <a:t>{</a:t>
+            </a:r>
+          </a:p>
+          <a:p>
+            <a:pPr marL="0" indent="0">
+              <a:buNone/>
+            </a:pPr>
+            <a:r>
+              <a:rPr lang="en-US" sz="1800" dirty="0">
+                <a:solidFill>
+                  <a:srgbClr val="000000"/>
+                </a:solidFill>
+                <a:latin typeface="Consolas" panose="020B0609020204030204" pitchFamily="49" charset="0"/>
+              </a:rPr>
+              <a:t>    </a:t>
+            </a:r>
+            <a:r>
+              <a:rPr lang="en-US" sz="1800" dirty="0" err="1">
+                <a:solidFill>
+                  <a:srgbClr val="000000"/>
+                </a:solidFill>
+                <a:latin typeface="Consolas" panose="020B0609020204030204" pitchFamily="49" charset="0"/>
+              </a:rPr>
+              <a:t>Console.WriteLine</a:t>
+            </a:r>
+            <a:r>
+              <a:rPr lang="en-US" sz="1800" dirty="0">
+                <a:solidFill>
+                  <a:srgbClr val="000000"/>
+                </a:solidFill>
+                <a:latin typeface="Consolas" panose="020B0609020204030204" pitchFamily="49" charset="0"/>
+              </a:rPr>
+              <a:t>(</a:t>
+            </a:r>
+            <a:r>
+              <a:rPr lang="en-US" sz="1800" dirty="0">
+                <a:solidFill>
+                  <a:srgbClr val="A31515"/>
+                </a:solidFill>
+                <a:latin typeface="Consolas" panose="020B0609020204030204" pitchFamily="49" charset="0"/>
+              </a:rPr>
+              <a:t>"You are </a:t>
+            </a:r>
+            <a:r>
+              <a:rPr lang="en-US" sz="1800" dirty="0" err="1">
+                <a:solidFill>
+                  <a:srgbClr val="A31515"/>
+                </a:solidFill>
+                <a:latin typeface="Consolas" panose="020B0609020204030204" pitchFamily="49" charset="0"/>
+              </a:rPr>
+              <a:t>gropwn</a:t>
+            </a:r>
+            <a:r>
+              <a:rPr lang="en-US" sz="1800" dirty="0">
+                <a:solidFill>
+                  <a:srgbClr val="A31515"/>
+                </a:solidFill>
+                <a:latin typeface="Consolas" panose="020B0609020204030204" pitchFamily="49" charset="0"/>
+              </a:rPr>
+              <a:t> up"</a:t>
+            </a:r>
+            <a:r>
+              <a:rPr lang="en-US" sz="1800" dirty="0">
+                <a:solidFill>
+                  <a:srgbClr val="000000"/>
+                </a:solidFill>
+                <a:latin typeface="Consolas" panose="020B0609020204030204" pitchFamily="49" charset="0"/>
+              </a:rPr>
+              <a:t>);</a:t>
+            </a:r>
+          </a:p>
+          <a:p>
+            <a:pPr marL="0" indent="0">
+              <a:buNone/>
+            </a:pPr>
+            <a:r>
+              <a:rPr lang="de-AT" sz="1800" dirty="0">
+                <a:solidFill>
+                  <a:srgbClr val="000000"/>
+                </a:solidFill>
+                <a:latin typeface="Consolas" panose="020B0609020204030204" pitchFamily="49" charset="0"/>
+              </a:rPr>
+              <a:t>}</a:t>
+            </a:r>
+            <a:endParaRPr sz="2109" dirty="0">
+              <a:latin typeface="Monaco"/>
+              <a:ea typeface="Monaco"/>
+              <a:cs typeface="Monaco"/>
+              <a:sym typeface="Monaco"/>
+            </a:endParaRPr>
+          </a:p>
+        </p:txBody>
+      </p:sp>
+      <p:sp>
+        <p:nvSpPr>
+          <p:cNvPr id="2" name="Titel 1"/>
+          <p:cNvSpPr>
+            <a:spLocks noGrp="1"/>
+          </p:cNvSpPr>
+          <p:nvPr>
+            <p:ph type="title"/>
+          </p:nvPr>
+        </p:nvSpPr>
+        <p:spPr/>
+        <p:txBody>
+          <a:bodyPr/>
+          <a:lstStyle/>
+          <a:p>
+            <a:r>
+              <a:rPr lang="de-AT" dirty="0"/>
+              <a:t>Neu in </a:t>
+            </a:r>
+            <a:r>
+              <a:rPr lang="de-AT" dirty="0" err="1"/>
+              <a:t>c#</a:t>
+            </a:r>
+            <a:r>
+              <a:rPr lang="de-AT" dirty="0"/>
+              <a:t> 9.0</a:t>
+            </a:r>
+            <a:endParaRPr lang="de-AT" sz="2800" spc="-90" dirty="0">
+              <a:effectLst>
+                <a:outerShdw blurRad="127000" dist="76200" dir="2700000" rotWithShape="0">
+                  <a:srgbClr val="000000">
+                    <a:alpha val="75000"/>
+                  </a:srgbClr>
+                </a:outerShdw>
+              </a:effectLst>
+              <a:ea typeface="+mn-ea"/>
+            </a:endParaRPr>
+          </a:p>
+        </p:txBody>
+      </p:sp>
+    </p:spTree>
+    <p:extLst>
+      <p:ext uri="{BB962C8B-B14F-4D97-AF65-F5344CB8AC3E}">
+        <p14:creationId xmlns:p14="http://schemas.microsoft.com/office/powerpoint/2010/main" val="3744535557"/>
+      </p:ext>
+    </p:extLst>
+  </p:cSld>
+  <p:clrMapOvr>
+    <a:masterClrMapping/>
+  </p:clrMapOvr>
+  <p:transition spd="med"/>
+</p:sld>
+</file>
+
+<file path=ppt/slides/slide9.xml><?xml version="1.0" encoding="utf-8"?>
+<p:sld xmlns:a="http://schemas.openxmlformats.org/drawingml/2006/main" xmlns:r="http://schemas.openxmlformats.org/officeDocument/2006/relationships" xmlns:p="http://schemas.openxmlformats.org/presentationml/2006/main">
+  <p:cSld>
+    <p:spTree>
+      <p:nvGrpSpPr>
+        <p:cNvPr id="1" name=""/>
+        <p:cNvGrpSpPr/>
+        <p:nvPr/>
+      </p:nvGrpSpPr>
+      <p:grpSpPr>
+        <a:xfrm>
+          <a:off x="0" y="0"/>
+          <a:ext cx="0" cy="0"/>
+          <a:chOff x="0" y="0"/>
+          <a:chExt cx="0" cy="0"/>
+        </a:xfrm>
+      </p:grpSpPr>
+      <p:sp>
+        <p:nvSpPr>
+          <p:cNvPr id="108" name="Shape 108"/>
+          <p:cNvSpPr>
+            <a:spLocks noGrp="1"/>
+          </p:cNvSpPr>
+          <p:nvPr>
+            <p:ph type="body" idx="1"/>
+          </p:nvPr>
+        </p:nvSpPr>
+        <p:spPr>
           <a:prstGeom prst="rect">
             <a:avLst/>
           </a:prstGeom>
@@ -17686,502 +18452,6 @@
       <p:bldP spid="108" grpId="0" build="p" advAuto="0"/>
     </p:bldLst>
   </p:timing>
-</p:sld>
-</file>
-
-<file path=ppt/slides/slide9.xml><?xml version="1.0" encoding="utf-8"?>
-<p:sld xmlns:a="http://schemas.openxmlformats.org/drawingml/2006/main" xmlns:r="http://schemas.openxmlformats.org/officeDocument/2006/relationships" xmlns:p="http://schemas.openxmlformats.org/presentationml/2006/main">
-  <p:cSld>
-    <p:bg>
-      <p:bgPr>
-        <a:solidFill>
-          <a:schemeClr val="bg1"/>
-        </a:solidFill>
-        <a:effectLst/>
-      </p:bgPr>
-    </p:bg>
-    <p:spTree>
-      <p:nvGrpSpPr>
-        <p:cNvPr id="1" name=""/>
-        <p:cNvGrpSpPr/>
-        <p:nvPr/>
-      </p:nvGrpSpPr>
-      <p:grpSpPr>
-        <a:xfrm>
-          <a:off x="0" y="0"/>
-          <a:ext cx="0" cy="0"/>
-          <a:chOff x="0" y="0"/>
-          <a:chExt cx="0" cy="0"/>
-        </a:xfrm>
-      </p:grpSpPr>
-      <p:sp>
-        <p:nvSpPr>
-          <p:cNvPr id="7" name="Textfeld 6"/>
-          <p:cNvSpPr txBox="1"/>
-          <p:nvPr/>
-        </p:nvSpPr>
-        <p:spPr>
-          <a:xfrm>
-            <a:off x="757169" y="1261240"/>
-            <a:ext cx="7453259" cy="646331"/>
-          </a:xfrm>
-          <a:prstGeom prst="rect">
-            <a:avLst/>
-          </a:prstGeom>
-          <a:noFill/>
-        </p:spPr>
-        <p:txBody>
-          <a:bodyPr wrap="none" rtlCol="0">
-            <a:spAutoFit/>
-          </a:bodyPr>
-          <a:lstStyle/>
-          <a:p>
-            <a:r>
-              <a:rPr lang="de-AT" b="1" i="1" dirty="0"/>
-              <a:t>Einseitige Verzweigung</a:t>
-            </a:r>
-          </a:p>
-          <a:p>
-            <a:r>
-              <a:rPr lang="de-AT" dirty="0"/>
-              <a:t>Trifft eine </a:t>
-            </a:r>
-            <a:r>
-              <a:rPr lang="de-AT" dirty="0">
-                <a:solidFill>
-                  <a:srgbClr val="FF0000"/>
-                </a:solidFill>
-              </a:rPr>
-              <a:t>&lt;</a:t>
-            </a:r>
-            <a:r>
-              <a:rPr lang="de-AT" i="1" dirty="0">
-                <a:solidFill>
-                  <a:srgbClr val="FF0000"/>
-                </a:solidFill>
-              </a:rPr>
-              <a:t>Bedingung&gt;</a:t>
-            </a:r>
-            <a:r>
-              <a:rPr lang="de-AT" dirty="0"/>
-              <a:t> zu, so werden bestimmte </a:t>
-            </a:r>
-            <a:r>
-              <a:rPr lang="de-AT" dirty="0">
-                <a:solidFill>
-                  <a:srgbClr val="CC3300"/>
-                </a:solidFill>
-              </a:rPr>
-              <a:t>&lt;</a:t>
-            </a:r>
-            <a:r>
-              <a:rPr lang="de-AT" i="1" dirty="0">
-                <a:solidFill>
-                  <a:srgbClr val="CC3300"/>
-                </a:solidFill>
-              </a:rPr>
-              <a:t>Anweisungen&gt;</a:t>
-            </a:r>
-            <a:r>
-              <a:rPr lang="de-AT" dirty="0">
-                <a:solidFill>
-                  <a:srgbClr val="CC3300"/>
-                </a:solidFill>
-              </a:rPr>
-              <a:t> </a:t>
-            </a:r>
-            <a:r>
-              <a:rPr lang="de-AT" dirty="0"/>
-              <a:t>ausgeführt.</a:t>
-            </a:r>
-          </a:p>
-        </p:txBody>
-      </p:sp>
-      <p:sp>
-        <p:nvSpPr>
-          <p:cNvPr id="12" name="Flussdiagramm: Verzweigung 11"/>
-          <p:cNvSpPr/>
-          <p:nvPr/>
-        </p:nvSpPr>
-        <p:spPr>
-          <a:xfrm>
-            <a:off x="2735796" y="2701400"/>
-            <a:ext cx="3348371" cy="756084"/>
-          </a:xfrm>
-          <a:prstGeom prst="flowChartDecision">
-            <a:avLst/>
-          </a:prstGeom>
-          <a:solidFill>
-            <a:schemeClr val="accent5">
-              <a:lumMod val="20000"/>
-              <a:lumOff val="80000"/>
-            </a:schemeClr>
-          </a:solidFill>
-        </p:spPr>
-        <p:style>
-          <a:lnRef idx="2">
-            <a:schemeClr val="accent1">
-              <a:shade val="50000"/>
-            </a:schemeClr>
-          </a:lnRef>
-          <a:fillRef idx="1">
-            <a:schemeClr val="accent1"/>
-          </a:fillRef>
-          <a:effectRef idx="0">
-            <a:schemeClr val="accent1"/>
-          </a:effectRef>
-          <a:fontRef idx="minor">
-            <a:schemeClr val="lt1"/>
-          </a:fontRef>
-        </p:style>
-        <p:txBody>
-          <a:bodyPr rtlCol="0" anchor="ctr"/>
-          <a:lstStyle/>
-          <a:p>
-            <a:pPr algn="ctr"/>
-            <a:r>
-              <a:rPr lang="de-AT" i="1" dirty="0">
-                <a:solidFill>
-                  <a:srgbClr val="FF0000"/>
-                </a:solidFill>
-              </a:rPr>
-              <a:t>&lt;Bedingung&gt;</a:t>
-            </a:r>
-          </a:p>
-        </p:txBody>
-      </p:sp>
-      <p:cxnSp>
-        <p:nvCxnSpPr>
-          <p:cNvPr id="14" name="Gerade Verbindung mit Pfeil 13"/>
-          <p:cNvCxnSpPr>
-            <a:endCxn id="12" idx="0"/>
-          </p:cNvCxnSpPr>
-          <p:nvPr/>
-        </p:nvCxnSpPr>
-        <p:spPr>
-          <a:xfrm flipH="1">
-            <a:off x="4409982" y="2197344"/>
-            <a:ext cx="1592" cy="504056"/>
-          </a:xfrm>
-          <a:prstGeom prst="straightConnector1">
-            <a:avLst/>
-          </a:prstGeom>
-          <a:ln w="22225">
-            <a:solidFill>
-              <a:schemeClr val="tx2"/>
-            </a:solidFill>
-            <a:tailEnd type="arrow"/>
-          </a:ln>
-        </p:spPr>
-        <p:style>
-          <a:lnRef idx="1">
-            <a:schemeClr val="accent1"/>
-          </a:lnRef>
-          <a:fillRef idx="0">
-            <a:schemeClr val="accent1"/>
-          </a:fillRef>
-          <a:effectRef idx="0">
-            <a:schemeClr val="accent1"/>
-          </a:effectRef>
-          <a:fontRef idx="minor">
-            <a:schemeClr val="tx1"/>
-          </a:fontRef>
-        </p:style>
-      </p:cxnSp>
-      <p:cxnSp>
-        <p:nvCxnSpPr>
-          <p:cNvPr id="17" name="Gewinkelte Verbindung 16"/>
-          <p:cNvCxnSpPr>
-            <a:stCxn id="12" idx="3"/>
-          </p:cNvCxnSpPr>
-          <p:nvPr/>
-        </p:nvCxnSpPr>
-        <p:spPr>
-          <a:xfrm>
-            <a:off x="6084167" y="3079442"/>
-            <a:ext cx="289626" cy="1494165"/>
-          </a:xfrm>
-          <a:prstGeom prst="bentConnector2">
-            <a:avLst/>
-          </a:prstGeom>
-          <a:ln w="22225">
-            <a:solidFill>
-              <a:schemeClr val="tx2"/>
-            </a:solidFill>
-            <a:tailEnd type="none"/>
-          </a:ln>
-        </p:spPr>
-        <p:style>
-          <a:lnRef idx="1">
-            <a:schemeClr val="accent1"/>
-          </a:lnRef>
-          <a:fillRef idx="0">
-            <a:schemeClr val="accent1"/>
-          </a:fillRef>
-          <a:effectRef idx="0">
-            <a:schemeClr val="accent1"/>
-          </a:effectRef>
-          <a:fontRef idx="minor">
-            <a:schemeClr val="tx1"/>
-          </a:fontRef>
-        </p:style>
-      </p:cxnSp>
-      <p:cxnSp>
-        <p:nvCxnSpPr>
-          <p:cNvPr id="19" name="Gewinkelte Verbindung 18"/>
-          <p:cNvCxnSpPr>
-            <a:stCxn id="12" idx="1"/>
-            <a:endCxn id="20" idx="0"/>
-          </p:cNvCxnSpPr>
-          <p:nvPr/>
-        </p:nvCxnSpPr>
-        <p:spPr>
-          <a:xfrm rot="10800000" flipV="1">
-            <a:off x="2447764" y="3079442"/>
-            <a:ext cx="288032" cy="630070"/>
-          </a:xfrm>
-          <a:prstGeom prst="bentConnector2">
-            <a:avLst/>
-          </a:prstGeom>
-          <a:ln w="22225">
-            <a:solidFill>
-              <a:schemeClr val="tx2"/>
-            </a:solidFill>
-            <a:tailEnd type="arrow"/>
-          </a:ln>
-        </p:spPr>
-        <p:style>
-          <a:lnRef idx="1">
-            <a:schemeClr val="accent1"/>
-          </a:lnRef>
-          <a:fillRef idx="0">
-            <a:schemeClr val="accent1"/>
-          </a:fillRef>
-          <a:effectRef idx="0">
-            <a:schemeClr val="accent1"/>
-          </a:effectRef>
-          <a:fontRef idx="minor">
-            <a:schemeClr val="tx1"/>
-          </a:fontRef>
-        </p:style>
-      </p:cxnSp>
-      <p:sp>
-        <p:nvSpPr>
-          <p:cNvPr id="20" name="Flussdiagramm: Prozess 19"/>
-          <p:cNvSpPr/>
-          <p:nvPr/>
-        </p:nvSpPr>
-        <p:spPr>
-          <a:xfrm>
-            <a:off x="1403018" y="3709512"/>
-            <a:ext cx="2089491" cy="504056"/>
-          </a:xfrm>
-          <a:prstGeom prst="flowChartProcess">
-            <a:avLst/>
-          </a:prstGeom>
-          <a:solidFill>
-            <a:schemeClr val="accent5">
-              <a:lumMod val="20000"/>
-              <a:lumOff val="80000"/>
-            </a:schemeClr>
-          </a:solidFill>
-        </p:spPr>
-        <p:style>
-          <a:lnRef idx="2">
-            <a:schemeClr val="accent1">
-              <a:shade val="50000"/>
-            </a:schemeClr>
-          </a:lnRef>
-          <a:fillRef idx="1">
-            <a:schemeClr val="accent1"/>
-          </a:fillRef>
-          <a:effectRef idx="0">
-            <a:schemeClr val="accent1"/>
-          </a:effectRef>
-          <a:fontRef idx="minor">
-            <a:schemeClr val="lt1"/>
-          </a:fontRef>
-        </p:style>
-        <p:txBody>
-          <a:bodyPr rtlCol="0" anchor="ctr"/>
-          <a:lstStyle/>
-          <a:p>
-            <a:pPr algn="ctr"/>
-            <a:r>
-              <a:rPr lang="de-AT" i="1" dirty="0">
-                <a:solidFill>
-                  <a:srgbClr val="CC3300"/>
-                </a:solidFill>
-              </a:rPr>
-              <a:t>&lt;Anweisungen&gt;</a:t>
-            </a:r>
-          </a:p>
-        </p:txBody>
-      </p:sp>
-      <p:cxnSp>
-        <p:nvCxnSpPr>
-          <p:cNvPr id="1025" name="Gewinkelte Verbindung 1024"/>
-          <p:cNvCxnSpPr>
-            <a:stCxn id="20" idx="2"/>
-          </p:cNvCxnSpPr>
-          <p:nvPr/>
-        </p:nvCxnSpPr>
-        <p:spPr>
-          <a:xfrm rot="16200000" flipH="1">
-            <a:off x="4230759" y="2430573"/>
-            <a:ext cx="360039" cy="3926028"/>
-          </a:xfrm>
-          <a:prstGeom prst="bentConnector2">
-            <a:avLst/>
-          </a:prstGeom>
-          <a:ln w="22225">
-            <a:solidFill>
-              <a:schemeClr val="tx2"/>
-            </a:solidFill>
-          </a:ln>
-        </p:spPr>
-        <p:style>
-          <a:lnRef idx="1">
-            <a:schemeClr val="accent1"/>
-          </a:lnRef>
-          <a:fillRef idx="0">
-            <a:schemeClr val="accent1"/>
-          </a:fillRef>
-          <a:effectRef idx="0">
-            <a:schemeClr val="accent1"/>
-          </a:effectRef>
-          <a:fontRef idx="minor">
-            <a:schemeClr val="tx1"/>
-          </a:fontRef>
-        </p:style>
-      </p:cxnSp>
-      <p:cxnSp>
-        <p:nvCxnSpPr>
-          <p:cNvPr id="1029" name="Gerade Verbindung mit Pfeil 1028"/>
-          <p:cNvCxnSpPr/>
-          <p:nvPr/>
-        </p:nvCxnSpPr>
-        <p:spPr>
-          <a:xfrm>
-            <a:off x="4428613" y="4573608"/>
-            <a:ext cx="0" cy="648072"/>
-          </a:xfrm>
-          <a:prstGeom prst="straightConnector1">
-            <a:avLst/>
-          </a:prstGeom>
-          <a:ln w="22225">
-            <a:solidFill>
-              <a:schemeClr val="tx2"/>
-            </a:solidFill>
-            <a:tailEnd type="arrow"/>
-          </a:ln>
-        </p:spPr>
-        <p:style>
-          <a:lnRef idx="1">
-            <a:schemeClr val="accent1"/>
-          </a:lnRef>
-          <a:fillRef idx="0">
-            <a:schemeClr val="accent1"/>
-          </a:fillRef>
-          <a:effectRef idx="0">
-            <a:schemeClr val="accent1"/>
-          </a:effectRef>
-          <a:fontRef idx="minor">
-            <a:schemeClr val="tx1"/>
-          </a:fontRef>
-        </p:style>
-      </p:cxnSp>
-      <p:sp>
-        <p:nvSpPr>
-          <p:cNvPr id="3" name="Textfeld 2"/>
-          <p:cNvSpPr txBox="1"/>
-          <p:nvPr/>
-        </p:nvSpPr>
-        <p:spPr>
-          <a:xfrm>
-            <a:off x="2341345" y="2764116"/>
-            <a:ext cx="599972" cy="369332"/>
-          </a:xfrm>
-          <a:prstGeom prst="rect">
-            <a:avLst/>
-          </a:prstGeom>
-          <a:noFill/>
-        </p:spPr>
-        <p:txBody>
-          <a:bodyPr wrap="none" rtlCol="0">
-            <a:spAutoFit/>
-          </a:bodyPr>
-          <a:lstStyle/>
-          <a:p>
-            <a:r>
-              <a:rPr lang="de-AT" dirty="0"/>
-              <a:t>True</a:t>
-            </a:r>
-          </a:p>
-        </p:txBody>
-      </p:sp>
-      <p:sp>
-        <p:nvSpPr>
-          <p:cNvPr id="18" name="Textfeld 17"/>
-          <p:cNvSpPr txBox="1"/>
-          <p:nvPr/>
-        </p:nvSpPr>
-        <p:spPr>
-          <a:xfrm>
-            <a:off x="5773821" y="2764116"/>
-            <a:ext cx="652936" cy="369332"/>
-          </a:xfrm>
-          <a:prstGeom prst="rect">
-            <a:avLst/>
-          </a:prstGeom>
-          <a:noFill/>
-        </p:spPr>
-        <p:txBody>
-          <a:bodyPr wrap="none" rtlCol="0">
-            <a:spAutoFit/>
-          </a:bodyPr>
-          <a:lstStyle/>
-          <a:p>
-            <a:r>
-              <a:rPr lang="de-AT" dirty="0" err="1"/>
-              <a:t>False</a:t>
-            </a:r>
-            <a:endParaRPr lang="de-AT" dirty="0"/>
-          </a:p>
-        </p:txBody>
-      </p:sp>
-      <p:sp>
-        <p:nvSpPr>
-          <p:cNvPr id="10" name="Titel 9"/>
-          <p:cNvSpPr>
-            <a:spLocks noGrp="1"/>
-          </p:cNvSpPr>
-          <p:nvPr>
-            <p:ph type="title"/>
-          </p:nvPr>
-        </p:nvSpPr>
-        <p:spPr/>
-        <p:txBody>
-          <a:bodyPr/>
-          <a:lstStyle/>
-          <a:p>
-            <a:r>
-              <a:rPr lang="de-AT" dirty="0"/>
-              <a:t>Einseitige Verzweigung</a:t>
-            </a:r>
-          </a:p>
-        </p:txBody>
-      </p:sp>
-    </p:spTree>
-    <p:extLst>
-      <p:ext uri="{BB962C8B-B14F-4D97-AF65-F5344CB8AC3E}">
-        <p14:creationId xmlns:p14="http://schemas.microsoft.com/office/powerpoint/2010/main" val="2666897657"/>
-      </p:ext>
-    </p:extLst>
-  </p:cSld>
-  <p:clrMapOvr>
-    <a:masterClrMapping/>
-  </p:clrMapOvr>
 </p:sld>
 </file>
 

--- a/03_Selektion/03_Selektion.pptx
+++ b/03_Selektion/03_Selektion.pptx
@@ -230,7 +230,7 @@
           <a:p>
             <a:fld id="{BF336932-01FD-45AF-B110-84880AA37D65}" type="datetimeFigureOut">
               <a:rPr lang="de-AT" smtClean="0"/>
-              <a:t>07.10.2021</a:t>
+              <a:t>12.10.2021</a:t>
             </a:fld>
             <a:endParaRPr lang="de-AT"/>
           </a:p>
@@ -2091,7 +2091,13 @@
       </p:sp>
       <p:pic>
         <p:nvPicPr>
-          <p:cNvPr id="5" name="Grafik 4"/>
+          <p:cNvPr id="6" name="Grafik 5">
+            <a:extLst>
+              <a:ext uri="{FF2B5EF4-FFF2-40B4-BE49-F238E27FC236}">
+                <a16:creationId xmlns:a16="http://schemas.microsoft.com/office/drawing/2014/main" id="{6C81548B-F0F7-4B3F-8320-1BAFBA82CD5A}"/>
+              </a:ext>
+            </a:extLst>
+          </p:cNvPr>
           <p:cNvPicPr>
             <a:picLocks noChangeAspect="1"/>
           </p:cNvPicPr>
@@ -2105,8 +2111,8 @@
         </p:blipFill>
         <p:spPr>
           <a:xfrm>
-            <a:off x="492320" y="1412776"/>
-            <a:ext cx="7608071" cy="3125129"/>
+            <a:off x="457200" y="1556792"/>
+            <a:ext cx="8230752" cy="2448619"/>
           </a:xfrm>
           <a:prstGeom prst="rect">
             <a:avLst/>
@@ -12587,7 +12593,7 @@
           </a:ln>
           <a:extLst>
             <a:ext uri="{C572A759-6A51-4108-AA02-DFA0A04FC94B}">
-              <ma14:wrappingTextBoxFlag xmlns="" xmlns:ma14="http://schemas.microsoft.com/office/mac/drawingml/2011/main" val="1"/>
+              <ma14:wrappingTextBoxFlag xmlns:ma14="http://schemas.microsoft.com/office/mac/drawingml/2011/main" xmlns="" val="1"/>
             </a:ext>
           </a:extLst>
         </p:spPr>
@@ -12637,7 +12643,7 @@
           </a:ln>
           <a:extLst>
             <a:ext uri="{C572A759-6A51-4108-AA02-DFA0A04FC94B}">
-              <ma14:wrappingTextBoxFlag xmlns="" xmlns:ma14="http://schemas.microsoft.com/office/mac/drawingml/2011/main" val="1"/>
+              <ma14:wrappingTextBoxFlag xmlns:ma14="http://schemas.microsoft.com/office/mac/drawingml/2011/main" xmlns="" val="1"/>
             </a:ext>
           </a:extLst>
         </p:spPr>
@@ -12735,7 +12741,7 @@
           </a:ln>
           <a:extLst>
             <a:ext uri="{C572A759-6A51-4108-AA02-DFA0A04FC94B}">
-              <ma14:wrappingTextBoxFlag xmlns="" xmlns:ma14="http://schemas.microsoft.com/office/mac/drawingml/2011/main" val="1"/>
+              <ma14:wrappingTextBoxFlag xmlns:ma14="http://schemas.microsoft.com/office/mac/drawingml/2011/main" xmlns="" val="1"/>
             </a:ext>
           </a:extLst>
         </p:spPr>
@@ -12791,7 +12797,7 @@
           </a:ln>
           <a:extLst>
             <a:ext uri="{C572A759-6A51-4108-AA02-DFA0A04FC94B}">
-              <ma14:wrappingTextBoxFlag xmlns="" xmlns:ma14="http://schemas.microsoft.com/office/mac/drawingml/2011/main" val="1"/>
+              <ma14:wrappingTextBoxFlag xmlns:ma14="http://schemas.microsoft.com/office/mac/drawingml/2011/main" xmlns="" val="1"/>
             </a:ext>
           </a:extLst>
         </p:spPr>
@@ -12855,7 +12861,7 @@
           </a:ln>
           <a:extLst>
             <a:ext uri="{C572A759-6A51-4108-AA02-DFA0A04FC94B}">
-              <ma14:wrappingTextBoxFlag xmlns="" xmlns:ma14="http://schemas.microsoft.com/office/mac/drawingml/2011/main" val="1"/>
+              <ma14:wrappingTextBoxFlag xmlns:ma14="http://schemas.microsoft.com/office/mac/drawingml/2011/main" xmlns="" val="1"/>
             </a:ext>
           </a:extLst>
         </p:spPr>
@@ -12919,7 +12925,7 @@
           </a:ln>
           <a:extLst>
             <a:ext uri="{C572A759-6A51-4108-AA02-DFA0A04FC94B}">
-              <ma14:wrappingTextBoxFlag xmlns="" xmlns:ma14="http://schemas.microsoft.com/office/mac/drawingml/2011/main" val="1"/>
+              <ma14:wrappingTextBoxFlag xmlns:ma14="http://schemas.microsoft.com/office/mac/drawingml/2011/main" xmlns="" val="1"/>
             </a:ext>
           </a:extLst>
         </p:spPr>
@@ -13021,7 +13027,7 @@
           </a:ln>
           <a:extLst>
             <a:ext uri="{C572A759-6A51-4108-AA02-DFA0A04FC94B}">
-              <ma14:wrappingTextBoxFlag xmlns="" xmlns:ma14="http://schemas.microsoft.com/office/mac/drawingml/2011/main" val="1"/>
+              <ma14:wrappingTextBoxFlag xmlns:ma14="http://schemas.microsoft.com/office/mac/drawingml/2011/main" xmlns="" val="1"/>
             </a:ext>
           </a:extLst>
         </p:spPr>
@@ -13556,7 +13562,7 @@
           </a:ln>
           <a:extLst>
             <a:ext uri="{C572A759-6A51-4108-AA02-DFA0A04FC94B}">
-              <ma14:wrappingTextBoxFlag xmlns="" xmlns:ma14="http://schemas.microsoft.com/office/mac/drawingml/2011/main" val="1"/>
+              <ma14:wrappingTextBoxFlag xmlns:ma14="http://schemas.microsoft.com/office/mac/drawingml/2011/main" xmlns="" val="1"/>
             </a:ext>
           </a:extLst>
         </p:spPr>
@@ -13603,7 +13609,7 @@
           </a:ln>
           <a:extLst>
             <a:ext uri="{C572A759-6A51-4108-AA02-DFA0A04FC94B}">
-              <ma14:wrappingTextBoxFlag xmlns="" xmlns:ma14="http://schemas.microsoft.com/office/mac/drawingml/2011/main" val="1"/>
+              <ma14:wrappingTextBoxFlag xmlns:ma14="http://schemas.microsoft.com/office/mac/drawingml/2011/main" xmlns="" val="1"/>
             </a:ext>
           </a:extLst>
         </p:spPr>
